--- a/presentation/TP_PostgreSQL_Multilingue.pptx
+++ b/presentation/TP_PostgreSQL_Multilingue.pptx
@@ -4,6 +4,9 @@
   <p:sldMasterIdLst>
     <p:sldMasterId id="2147483648" r:id="rId1"/>
   </p:sldMasterIdLst>
+  <p:notesMasterIdLst>
+    <p:notesMasterId r:id="rId10"/>
+  </p:notesMasterIdLst>
   <p:sldIdLst>
     <p:sldId id="256" r:id="rId2"/>
     <p:sldId id="257" r:id="rId3"/>
@@ -14,9 +17,6 @@
     <p:sldId id="262" r:id="rId8"/>
     <p:sldId id="263" r:id="rId9"/>
   </p:sldIdLst>
-  <p:notesMasterIdLst>
-    <p:notesMasterId r:id="rId10"/>
-  </p:notesMasterIdLst>
   <p:sldSz cx="12192000" cy="6858000"/>
   <p:notesSz cx="6858000" cy="12192000"/>
   <p:defaultTextStyle>
@@ -111,6 +111,11 @@
       </a:defRPr>
     </a:lvl9pPr>
   </p:defaultTextStyle>
+  <p:extLst>
+    <p:ext uri="{EFAFB233-063F-42B5-8137-9DF3F51BA10A}">
+      <p15:sldGuideLst xmlns:p15="http://schemas.microsoft.com/office/powerpoint/2012/main"/>
+    </p:ext>
+  </p:extLst>
 </p:presentation>
 </file>
 
@@ -136,234 +141,10 @@
           <a:chExt cx="0" cy="0"/>
         </a:xfrm>
       </p:grpSpPr>
-      <p:sp>
-        <p:nvSpPr>
-          <p:cNvPr id="2" name="Header Placeholder 1"/>
-          <p:cNvSpPr>
-            <a:spLocks noGrp="1"/>
-          </p:cNvSpPr>
-          <p:nvPr>
-            <p:ph type="hdr" sz="quarter"/>
-          </p:nvPr>
-        </p:nvSpPr>
-        <p:spPr>
-          <a:xfrm>
-            <a:off x="0" y="0"/>
-            <a:ext cx="2971800" cy="458788"/>
-          </a:xfrm>
-          <a:prstGeom prst="rect">
-            <a:avLst/>
-          </a:prstGeom>
-        </p:spPr>
-        <p:txBody>
-          <a:bodyPr vert="horz" lIns="91440" tIns="45720" rIns="91440" bIns="45720" rtlCol="0"/>
-          <a:lstStyle>
-            <a:lvl1pPr algn="l">
-              <a:defRPr sz="1200"/>
-            </a:lvl1pPr>
-          </a:lstStyle>
-          <a:p>
-            <a:endParaRPr lang="en-US"/>
-          </a:p>
-        </p:txBody>
-      </p:sp>
-      <p:sp>
-        <p:nvSpPr>
-          <p:cNvPr id="3" name="Date Placeholder 2"/>
-          <p:cNvSpPr>
-            <a:spLocks noGrp="1"/>
-          </p:cNvSpPr>
-          <p:nvPr>
-            <p:ph type="dt" idx="1"/>
-          </p:nvPr>
-        </p:nvSpPr>
-        <p:spPr>
-          <a:xfrm>
-            <a:off x="3884613" y="0"/>
-            <a:ext cx="2971800" cy="458788"/>
-          </a:xfrm>
-          <a:prstGeom prst="rect">
-            <a:avLst/>
-          </a:prstGeom>
-        </p:spPr>
-        <p:txBody>
-          <a:bodyPr vert="horz" lIns="91440" tIns="45720" rIns="91440" bIns="45720" rtlCol="0"/>
-          <a:lstStyle>
-            <a:lvl1pPr algn="r">
-              <a:defRPr sz="1200"/>
-            </a:lvl1pPr>
-          </a:lstStyle>
-          <a:p>
-            <a:fld id="{5282F153-3F37-0F45-9E97-73ACFA13230C}" type="datetimeFigureOut">
-              <a:rPr lang="en-US"/>
-              <a:t>7/23/19</a:t>
-            </a:fld>
-            <a:endParaRPr lang="en-US"/>
-          </a:p>
-        </p:txBody>
-      </p:sp>
-      <p:sp>
-        <p:nvSpPr>
-          <p:cNvPr id="4" name="Slide Image Placeholder 3"/>
-          <p:cNvSpPr>
-            <a:spLocks noGrp="1" noRot="1" noChangeAspect="1"/>
-          </p:cNvSpPr>
-          <p:nvPr>
-            <p:ph type="sldImg" idx="2"/>
-          </p:nvPr>
-        </p:nvSpPr>
-        <p:spPr>
-          <a:xfrm>
-            <a:off x="685800" y="1143000"/>
-            <a:ext cx="5486400" cy="3086100"/>
-          </a:xfrm>
-          <a:prstGeom prst="rect">
-            <a:avLst/>
-          </a:prstGeom>
-          <a:noFill/>
-          <a:ln w="12700">
-            <a:solidFill>
-              <a:prstClr val="black"/>
-            </a:solidFill>
-          </a:ln>
-        </p:spPr>
-        <p:txBody>
-          <a:bodyPr vert="horz" lIns="91440" tIns="45720" rIns="91440" bIns="45720" rtlCol="0" anchor="ctr"/>
-          <a:lstStyle/>
-          <a:p>
-            <a:endParaRPr lang="en-US"/>
-          </a:p>
-        </p:txBody>
-      </p:sp>
-      <p:sp>
-        <p:nvSpPr>
-          <p:cNvPr id="5" name="Notes Placeholder 4"/>
-          <p:cNvSpPr>
-            <a:spLocks noGrp="1"/>
-          </p:cNvSpPr>
-          <p:nvPr>
-            <p:ph type="body" sz="quarter" idx="3"/>
-          </p:nvPr>
-        </p:nvSpPr>
-        <p:spPr>
-          <a:xfrm>
-            <a:off x="685800" y="4400550"/>
-            <a:ext cx="5486400" cy="3600450"/>
-          </a:xfrm>
-          <a:prstGeom prst="rect">
-            <a:avLst/>
-          </a:prstGeom>
-        </p:spPr>
-        <p:txBody>
-          <a:bodyPr vert="horz" lIns="91440" tIns="45720" rIns="91440" bIns="45720" rtlCol="0"/>
-          <a:lstStyle/>
-          <a:p>
-            <a:pPr lvl="0"/>
-            <a:r>
-              <a:rPr lang="en-US"/>
-              <a:t>Click to edit Master text styles</a:t>
-            </a:r>
-          </a:p>
-          <a:p>
-            <a:pPr lvl="1"/>
-            <a:r>
-              <a:rPr lang="en-US"/>
-              <a:t>Second level</a:t>
-            </a:r>
-          </a:p>
-          <a:p>
-            <a:pPr lvl="2"/>
-            <a:r>
-              <a:rPr lang="en-US"/>
-              <a:t>Third level</a:t>
-            </a:r>
-          </a:p>
-          <a:p>
-            <a:pPr lvl="3"/>
-            <a:r>
-              <a:rPr lang="en-US"/>
-              <a:t>Fourth level</a:t>
-            </a:r>
-          </a:p>
-          <a:p>
-            <a:pPr lvl="4"/>
-            <a:r>
-              <a:rPr lang="en-US"/>
-              <a:t>Fifth level</a:t>
-            </a:r>
-          </a:p>
-        </p:txBody>
-      </p:sp>
-      <p:sp>
-        <p:nvSpPr>
-          <p:cNvPr id="6" name="Footer Placeholder 5"/>
-          <p:cNvSpPr>
-            <a:spLocks noGrp="1"/>
-          </p:cNvSpPr>
-          <p:nvPr>
-            <p:ph type="ftr" sz="quarter" idx="4"/>
-          </p:nvPr>
-        </p:nvSpPr>
-        <p:spPr>
-          <a:xfrm>
-            <a:off x="0" y="8685213"/>
-            <a:ext cx="2971800" cy="458787"/>
-          </a:xfrm>
-          <a:prstGeom prst="rect">
-            <a:avLst/>
-          </a:prstGeom>
-        </p:spPr>
-        <p:txBody>
-          <a:bodyPr vert="horz" lIns="91440" tIns="45720" rIns="91440" bIns="45720" rtlCol="0" anchor="b"/>
-          <a:lstStyle>
-            <a:lvl1pPr algn="l">
-              <a:defRPr sz="1200"/>
-            </a:lvl1pPr>
-          </a:lstStyle>
-          <a:p>
-            <a:endParaRPr lang="en-US"/>
-          </a:p>
-        </p:txBody>
-      </p:sp>
-      <p:sp>
-        <p:nvSpPr>
-          <p:cNvPr id="7" name="Slide Number Placeholder 6"/>
-          <p:cNvSpPr>
-            <a:spLocks noGrp="1"/>
-          </p:cNvSpPr>
-          <p:nvPr>
-            <p:ph type="sldNum" sz="quarter" idx="5"/>
-          </p:nvPr>
-        </p:nvSpPr>
-        <p:spPr>
-          <a:xfrm>
-            <a:off x="3884613" y="8685213"/>
-            <a:ext cx="2971800" cy="458787"/>
-          </a:xfrm>
-          <a:prstGeom prst="rect">
-            <a:avLst/>
-          </a:prstGeom>
-        </p:spPr>
-        <p:txBody>
-          <a:bodyPr vert="horz" lIns="91440" tIns="45720" rIns="91440" bIns="45720" rtlCol="0" anchor="b"/>
-          <a:lstStyle>
-            <a:lvl1pPr algn="r">
-              <a:defRPr sz="1200"/>
-            </a:lvl1pPr>
-          </a:lstStyle>
-          <a:p>
-            <a:fld id="{CE5E9CC1-C706-0F49-92D6-E571CC5EEA8F}" type="slidenum">
-              <a:rPr lang="en-US"/>
-              <a:t>‹#›</a:t>
-            </a:fld>
-            <a:endParaRPr lang="en-US"/>
-          </a:p>
-        </p:txBody>
-      </p:sp>
     </p:spTree>
     <p:extLst>
       <p:ext uri="{BB962C8B-B14F-4D97-AF65-F5344CB8AC3E}">
-        <p14:creationId xmlns:p14="http://schemas.microsoft.com/office/powerpoint/2010/main" val="1024086991"/>
+        <p14:creationId xmlns:p14="http://schemas.microsoft.com/office/powerpoint/2010/main" val="3560299317"/>
       </p:ext>
     </p:extLst>
   </p:cSld>
@@ -507,10 +288,6 @@
           <a:bodyPr/>
           <a:lstStyle/>
           <a:p>
-            <a:r>
-              <a:rPr lang="en-US" dirty="0"/>
-              <a:t/>
-            </a:r>
             <a:endParaRPr lang="en-US" dirty="0"/>
           </a:p>
         </p:txBody>
@@ -595,10 +372,6 @@
           <a:bodyPr/>
           <a:lstStyle/>
           <a:p>
-            <a:r>
-              <a:rPr lang="en-US" dirty="0"/>
-              <a:t/>
-            </a:r>
             <a:endParaRPr lang="en-US" dirty="0"/>
           </a:p>
         </p:txBody>
@@ -683,10 +456,6 @@
           <a:bodyPr/>
           <a:lstStyle/>
           <a:p>
-            <a:r>
-              <a:rPr lang="en-US" dirty="0"/>
-              <a:t/>
-            </a:r>
             <a:endParaRPr lang="en-US" dirty="0"/>
           </a:p>
         </p:txBody>
@@ -771,10 +540,6 @@
           <a:bodyPr/>
           <a:lstStyle/>
           <a:p>
-            <a:r>
-              <a:rPr lang="en-US" dirty="0"/>
-              <a:t/>
-            </a:r>
             <a:endParaRPr lang="en-US" dirty="0"/>
           </a:p>
         </p:txBody>
@@ -859,10 +624,6 @@
           <a:bodyPr/>
           <a:lstStyle/>
           <a:p>
-            <a:r>
-              <a:rPr lang="en-US" dirty="0"/>
-              <a:t/>
-            </a:r>
             <a:endParaRPr lang="en-US" dirty="0"/>
           </a:p>
         </p:txBody>
@@ -947,10 +708,6 @@
           <a:bodyPr/>
           <a:lstStyle/>
           <a:p>
-            <a:r>
-              <a:rPr lang="en-US" dirty="0"/>
-              <a:t/>
-            </a:r>
             <a:endParaRPr lang="en-US" dirty="0"/>
           </a:p>
         </p:txBody>
@@ -1035,10 +792,6 @@
           <a:bodyPr/>
           <a:lstStyle/>
           <a:p>
-            <a:r>
-              <a:rPr lang="en-US" dirty="0"/>
-              <a:t/>
-            </a:r>
             <a:endParaRPr lang="en-US" dirty="0"/>
           </a:p>
         </p:txBody>
@@ -1123,10 +876,6 @@
           <a:bodyPr/>
           <a:lstStyle/>
           <a:p>
-            <a:r>
-              <a:rPr lang="en-US" dirty="0"/>
-              <a:t/>
-            </a:r>
             <a:endParaRPr lang="en-US" dirty="0"/>
           </a:p>
         </p:txBody>
@@ -1200,6 +949,11 @@
 <file path=ppt/slideMasters/slideMaster1.xml><?xml version="1.0" encoding="utf-8"?>
 <p:sldMaster xmlns:a="http://schemas.openxmlformats.org/drawingml/2006/main" xmlns:r="http://schemas.openxmlformats.org/officeDocument/2006/relationships" xmlns:p="http://schemas.openxmlformats.org/presentationml/2006/main">
   <p:cSld>
+    <p:bg>
+      <p:bgRef idx="1001">
+        <a:schemeClr val="bg1"/>
+      </p:bgRef>
+    </p:bg>
     <p:spTree>
       <p:nvGrpSpPr>
         <p:cNvPr id="1" name=""/>
@@ -1482,6 +1236,7 @@
         <a:solidFill>
           <a:srgbClr val="101B2D"/>
         </a:solidFill>
+        <a:effectLst/>
       </p:bgPr>
     </p:bg>
     <p:spTree>
@@ -1522,6 +1277,13 @@
             <a:prstDash val="solid"/>
           </a:ln>
         </p:spPr>
+        <p:txBody>
+          <a:bodyPr/>
+          <a:lstStyle/>
+          <a:p>
+            <a:endParaRPr lang="fr-FR"/>
+          </a:p>
+        </p:txBody>
       </p:sp>
       <p:sp>
         <p:nvSpPr>
@@ -1544,11 +1306,11 @@
           <a:bodyPr wrap="square" lIns="0" tIns="0" rIns="0" bIns="0" rtlCol="0" anchor="ctr"/>
           <a:lstStyle/>
           <a:p>
-            <a:pPr indent="0" marL="0">
-              <a:buNone/>
-            </a:pPr>
-            <a:r>
-              <a:rPr lang="en-US" sz="1100" b="1" spc="200" kern="0" dirty="0">
+            <a:pPr marL="0" indent="0">
+              <a:buNone/>
+            </a:pPr>
+            <a:r>
+              <a:rPr lang="en-US" sz="1100" b="1" kern="0" spc="200" dirty="0">
                 <a:solidFill>
                   <a:srgbClr val="42C6D8"/>
                 </a:solidFill>
@@ -1580,30 +1342,16 @@
           <a:bodyPr wrap="square" lIns="0" tIns="0" rIns="0" bIns="0" rtlCol="0" anchor="ctr"/>
           <a:lstStyle/>
           <a:p>
-            <a:pPr indent="0" marL="0">
-              <a:buNone/>
-            </a:pPr>
-            <a:r>
-              <a:rPr lang="en-US" sz="3300" b="1" dirty="0">
+            <a:pPr marL="0" indent="0">
+              <a:buNone/>
+            </a:pPr>
+            <a:r>
+              <a:rPr lang="fr-FR" sz="3300" b="1">
                 <a:solidFill>
                   <a:srgbClr val="F6F8FB"/>
                 </a:solidFill>
               </a:rPr>
-              <a:t>Administrer une base</a:t>
-            </a:r>
-            <a:endParaRPr lang="en-US" sz="3300" dirty="0"/>
-          </a:p>
-          <a:p>
-            <a:pPr indent="0" marL="0">
-              <a:buNone/>
-            </a:pPr>
-            <a:r>
-              <a:rPr lang="en-US" sz="3300" b="1" dirty="0">
-                <a:solidFill>
-                  <a:srgbClr val="F6F8FB"/>
-                </a:solidFill>
-              </a:rPr>
-              <a:t>multilingue, de bout en bout.</a:t>
+              <a:t>Répondre aux cinq exercices du TP PostgreSQL.</a:t>
             </a:r>
             <a:endParaRPr lang="en-US" sz="3300" dirty="0"/>
           </a:p>
@@ -1630,7 +1378,7 @@
           <a:bodyPr wrap="square" lIns="0" tIns="0" rIns="0" bIns="0" rtlCol="0" anchor="ctr"/>
           <a:lstStyle/>
           <a:p>
-            <a:pPr indent="0" marL="0">
+            <a:pPr marL="0" indent="0">
               <a:buNone/>
             </a:pPr>
             <a:r>
@@ -1671,6 +1419,13 @@
             <a:prstDash val="solid"/>
           </a:ln>
         </p:spPr>
+        <p:txBody>
+          <a:bodyPr/>
+          <a:lstStyle/>
+          <a:p>
+            <a:endParaRPr lang="fr-FR"/>
+          </a:p>
+        </p:txBody>
       </p:sp>
       <p:sp>
         <p:nvSpPr>
@@ -1693,7 +1448,7 @@
           <a:bodyPr wrap="square" lIns="0" tIns="0" rIns="0" bIns="0" rtlCol="0" anchor="ctr"/>
           <a:lstStyle/>
           <a:p>
-            <a:pPr algn="ctr" indent="0" marL="0">
+            <a:pPr marL="0" indent="0" algn="ctr">
               <a:buNone/>
             </a:pPr>
             <a:r>
@@ -1729,7 +1484,7 @@
           <a:bodyPr wrap="square" lIns="0" tIns="0" rIns="0" bIns="0" rtlCol="0" anchor="ctr"/>
           <a:lstStyle/>
           <a:p>
-            <a:pPr algn="ctr" indent="0" marL="0">
+            <a:pPr marL="0" indent="0" algn="ctr">
               <a:buNone/>
             </a:pPr>
             <a:r>
@@ -1765,11 +1520,11 @@
           <a:bodyPr wrap="square" lIns="0" tIns="0" rIns="0" bIns="0" rtlCol="0" anchor="ctr"/>
           <a:lstStyle/>
           <a:p>
-            <a:pPr algn="ctr" indent="0" marL="0">
-              <a:buNone/>
-            </a:pPr>
-            <a:r>
-              <a:rPr lang="en-US" sz="2900" b="1" dirty="0">
+            <a:pPr marL="0" indent="0" algn="ctr">
+              <a:buNone/>
+            </a:pPr>
+            <a:r>
+              <a:rPr lang="en-US" sz="2900" b="1">
                 <a:solidFill>
                   <a:srgbClr val="73D7B0"/>
                 </a:solidFill>
@@ -1801,7 +1556,7 @@
           <a:bodyPr wrap="square" lIns="0" tIns="0" rIns="0" bIns="0" rtlCol="0" anchor="ctr"/>
           <a:lstStyle/>
           <a:p>
-            <a:pPr algn="ctr" indent="0" marL="0">
+            <a:pPr marL="0" indent="0" algn="ctr">
               <a:buNone/>
             </a:pPr>
             <a:r>
@@ -1837,7 +1592,7 @@
           <a:bodyPr wrap="square" lIns="0" tIns="0" rIns="0" bIns="0" rtlCol="0" anchor="ctr"/>
           <a:lstStyle/>
           <a:p>
-            <a:pPr algn="ctr" indent="0" marL="0">
+            <a:pPr marL="0" indent="0" algn="ctr">
               <a:buNone/>
             </a:pPr>
             <a:r>
@@ -1873,7 +1628,7 @@
           <a:bodyPr wrap="square" lIns="0" tIns="0" rIns="0" bIns="0" rtlCol="0" anchor="ctr"/>
           <a:lstStyle/>
           <a:p>
-            <a:pPr algn="ctr" indent="0" marL="0">
+            <a:pPr marL="0" indent="0" algn="ctr">
               <a:buNone/>
             </a:pPr>
             <a:r>
@@ -1909,16 +1664,16 @@
           <a:bodyPr wrap="square" lIns="0" tIns="0" rIns="0" bIns="0" rtlCol="0" anchor="ctr"/>
           <a:lstStyle/>
           <a:p>
-            <a:pPr algn="ctr" indent="0" marL="0">
-              <a:buNone/>
-            </a:pPr>
-            <a:r>
-              <a:rPr lang="en-US" sz="2900" b="1" dirty="0">
+            <a:pPr marL="0" indent="0" algn="ctr">
+              <a:buNone/>
+            </a:pPr>
+            <a:r>
+              <a:rPr lang="en-US" sz="2900" b="1">
                 <a:solidFill>
                   <a:srgbClr val="42C6D8"/>
                 </a:solidFill>
               </a:rPr>
-              <a:t>7</a:t>
+              <a:t>5</a:t>
             </a:r>
             <a:endParaRPr lang="en-US" sz="2900" dirty="0"/>
           </a:p>
@@ -1945,7 +1700,7 @@
           <a:bodyPr wrap="square" lIns="0" tIns="0" rIns="0" bIns="0" rtlCol="0" anchor="ctr"/>
           <a:lstStyle/>
           <a:p>
-            <a:pPr algn="ctr" indent="0" marL="0">
+            <a:pPr marL="0" indent="0" algn="ctr">
               <a:buNone/>
             </a:pPr>
             <a:r>
@@ -1981,16 +1736,16 @@
           <a:bodyPr wrap="square" lIns="0" tIns="0" rIns="0" bIns="0" rtlCol="0" anchor="ctr"/>
           <a:lstStyle/>
           <a:p>
-            <a:pPr algn="ctr" indent="0" marL="0">
-              <a:buNone/>
-            </a:pPr>
-            <a:r>
-              <a:rPr lang="en-US" sz="2900" b="1" dirty="0">
+            <a:pPr marL="0" indent="0" algn="ctr">
+              <a:buNone/>
+            </a:pPr>
+            <a:r>
+              <a:rPr lang="en-US" sz="2900" b="1">
                 <a:solidFill>
                   <a:srgbClr val="EF7B79"/>
                 </a:solidFill>
               </a:rPr>
-              <a:t>8</a:t>
+              <a:t>6</a:t>
             </a:r>
             <a:endParaRPr lang="en-US" sz="2900" dirty="0"/>
           </a:p>
@@ -2017,7 +1772,7 @@
           <a:bodyPr wrap="square" lIns="0" tIns="0" rIns="0" bIns="0" rtlCol="0" anchor="ctr"/>
           <a:lstStyle/>
           <a:p>
-            <a:pPr algn="ctr" indent="0" marL="0">
+            <a:pPr marL="0" indent="0" algn="ctr">
               <a:buNone/>
             </a:pPr>
             <a:r>
@@ -2053,18 +1808,119 @@
           <a:bodyPr wrap="square" lIns="0" tIns="0" rIns="0" bIns="0" rtlCol="0" anchor="ctr"/>
           <a:lstStyle/>
           <a:p>
-            <a:pPr indent="0" marL="0">
-              <a:buNone/>
-            </a:pPr>
-            <a:r>
-              <a:rPr lang="en-US" sz="1050" dirty="0">
+            <a:pPr marL="0" indent="0">
+              <a:buNone/>
+            </a:pPr>
+            <a:r>
+              <a:rPr lang="fr-FR" sz="1050">
                 <a:solidFill>
                   <a:srgbClr val="A9B8C9"/>
                 </a:solidFill>
               </a:rPr>
-              <a:t>PostgreSQL 17 · validation réelle sous Windows</a:t>
+              <a:t>TP noté · projet PostgreSQL</a:t>
             </a:r>
             <a:endParaRPr lang="en-US" sz="1050" dirty="0"/>
+          </a:p>
+        </p:txBody>
+      </p:sp>
+      <p:sp>
+        <p:nvSpPr>
+          <p:cNvPr id="18" name="Team Label">
+            <a:extLst>
+              <a:ext uri="{FF2B5EF4-FFF2-40B4-BE49-F238E27FC236}">
+                <a16:creationId xmlns:a16="http://schemas.microsoft.com/office/drawing/2014/main" id="{E4F79DB6-6B78-F736-5A35-F90FC05D27C2}"/>
+              </a:ext>
+            </a:extLst>
+          </p:cNvPr>
+          <p:cNvSpPr txBox="1"/>
+          <p:nvPr/>
+        </p:nvSpPr>
+        <p:spPr>
+          <a:xfrm>
+            <a:off x="685800" y="5334000"/>
+            <a:ext cx="6766560" cy="138499"/>
+          </a:xfrm>
+          <a:prstGeom prst="rect">
+            <a:avLst/>
+          </a:prstGeom>
+          <a:noFill/>
+        </p:spPr>
+        <p:txBody>
+          <a:bodyPr vert="horz" lIns="0" tIns="0" rIns="0" bIns="0" rtlCol="0">
+            <a:spAutoFit/>
+          </a:bodyPr>
+          <a:lstStyle/>
+          <a:p>
+            <a:r>
+              <a:rPr lang="fr-FR" sz="900" b="1">
+                <a:solidFill>
+                  <a:srgbClr val="329CE2"/>
+                </a:solidFill>
+                <a:latin typeface="Aptos" panose="020B0004020202020204" pitchFamily="34" charset="0"/>
+              </a:rPr>
+              <a:t>ÉQUIPE</a:t>
+            </a:r>
+          </a:p>
+        </p:txBody>
+      </p:sp>
+      <p:sp>
+        <p:nvSpPr>
+          <p:cNvPr id="19" name="Team Names">
+            <a:extLst>
+              <a:ext uri="{FF2B5EF4-FFF2-40B4-BE49-F238E27FC236}">
+                <a16:creationId xmlns:a16="http://schemas.microsoft.com/office/drawing/2014/main" id="{ACB2A93F-9FB2-4226-FF0B-F54B35387FBD}"/>
+              </a:ext>
+            </a:extLst>
+          </p:cNvPr>
+          <p:cNvSpPr txBox="1"/>
+          <p:nvPr/>
+        </p:nvSpPr>
+        <p:spPr>
+          <a:xfrm>
+            <a:off x="685800" y="5588000"/>
+            <a:ext cx="6766560" cy="394980"/>
+          </a:xfrm>
+          <a:prstGeom prst="rect">
+            <a:avLst/>
+          </a:prstGeom>
+          <a:noFill/>
+        </p:spPr>
+        <p:txBody>
+          <a:bodyPr vert="horz" lIns="0" tIns="0" rIns="0" bIns="0" rtlCol="0">
+            <a:spAutoFit/>
+          </a:bodyPr>
+          <a:lstStyle/>
+          <a:p>
+            <a:pPr>
+              <a:spcAft>
+                <a:spcPts val="200"/>
+              </a:spcAft>
+            </a:pPr>
+            <a:r>
+              <a:rPr lang="fr-FR" sz="1200" dirty="0">
+                <a:solidFill>
+                  <a:srgbClr val="AAE5F5"/>
+                </a:solidFill>
+                <a:latin typeface="Aptos" panose="020B0004020202020204" pitchFamily="34" charset="0"/>
+              </a:rPr>
+              <a:t>Floryan BORNET · BRENDLE Corentin</a:t>
+            </a:r>
+          </a:p>
+          <a:p>
+            <a:pPr>
+              <a:spcAft>
+                <a:spcPts val="200"/>
+              </a:spcAft>
+            </a:pPr>
+            <a:r>
+              <a:rPr lang="fr-FR" sz="1200">
+                <a:solidFill>
+                  <a:srgbClr val="AAE5F5"/>
+                </a:solidFill>
+                <a:latin typeface="Aptos" panose="020B0004020202020204" pitchFamily="34" charset="0"/>
+              </a:rPr>
+              <a:t>Simon Bonnin · Valentin Viret-Jacquot</a:t>
+            </a:r>
           </a:p>
         </p:txBody>
       </p:sp>
@@ -2084,6 +1940,7 @@
         <a:solidFill>
           <a:srgbClr val="101B2D"/>
         </a:solidFill>
+        <a:effectLst/>
       </p:bgPr>
     </p:bg>
     <p:spTree>
@@ -2124,6 +1981,13 @@
             <a:prstDash val="solid"/>
           </a:ln>
         </p:spPr>
+        <p:txBody>
+          <a:bodyPr/>
+          <a:lstStyle/>
+          <a:p>
+            <a:endParaRPr lang="fr-FR"/>
+          </a:p>
+        </p:txBody>
       </p:sp>
       <p:sp>
         <p:nvSpPr>
@@ -2146,11 +2010,11 @@
           <a:bodyPr wrap="square" lIns="0" tIns="0" rIns="0" bIns="0" rtlCol="0" anchor="ctr"/>
           <a:lstStyle/>
           <a:p>
-            <a:pPr indent="0" marL="0">
-              <a:buNone/>
-            </a:pPr>
-            <a:r>
-              <a:rPr lang="en-US" sz="1000" b="1" spc="200" kern="0" dirty="0">
+            <a:pPr marL="0" indent="0">
+              <a:buNone/>
+            </a:pPr>
+            <a:r>
+              <a:rPr lang="en-US" sz="1000" b="1" kern="0" spc="200" dirty="0">
                 <a:solidFill>
                   <a:srgbClr val="42C6D8"/>
                 </a:solidFill>
@@ -2182,16 +2046,16 @@
           <a:bodyPr wrap="square" lIns="0" tIns="0" rIns="0" bIns="0" rtlCol="0" anchor="ctr"/>
           <a:lstStyle/>
           <a:p>
-            <a:pPr indent="0" marL="0">
-              <a:buNone/>
-            </a:pPr>
-            <a:r>
-              <a:rPr lang="en-US" sz="2800" b="1" dirty="0">
+            <a:pPr marL="0" indent="0">
+              <a:buNone/>
+            </a:pPr>
+            <a:r>
+              <a:rPr lang="fr-FR" sz="2800" b="1">
                 <a:solidFill>
                   <a:srgbClr val="F6F8FB"/>
                 </a:solidFill>
               </a:rPr>
-              <a:t>Un seul projet couvre les cinq exercices du TP.</a:t>
+              <a:t>Le projet répond directement aux cinq exercices du TP.</a:t>
             </a:r>
             <a:endParaRPr lang="en-US" sz="2800" dirty="0"/>
           </a:p>
@@ -2218,16 +2082,16 @@
           <a:bodyPr wrap="square" lIns="0" tIns="0" rIns="0" bIns="0" rtlCol="0" anchor="ctr"/>
           <a:lstStyle/>
           <a:p>
-            <a:pPr indent="0" marL="0">
-              <a:buNone/>
-            </a:pPr>
-            <a:r>
-              <a:rPr lang="en-US" sz="1300" dirty="0">
+            <a:pPr marL="0" indent="0">
+              <a:buNone/>
+            </a:pPr>
+            <a:r>
+              <a:rPr lang="fr-FR" sz="1300">
                 <a:solidFill>
                   <a:srgbClr val="A9B8C9"/>
                 </a:solidFill>
               </a:rPr>
-              <a:t>La démonstration suit le cycle de vie complet d'une base administrée.</a:t>
+              <a:t>La présentation suit la création, les droits et les restaurations.</a:t>
             </a:r>
             <a:endParaRPr lang="en-US" sz="1300" dirty="0"/>
           </a:p>
@@ -2254,7 +2118,7 @@
           <a:bodyPr wrap="square" lIns="0" tIns="0" rIns="0" bIns="0" rtlCol="0" anchor="ctr"/>
           <a:lstStyle/>
           <a:p>
-            <a:pPr algn="r" indent="0" marL="0">
+            <a:pPr marL="0" indent="0" algn="r">
               <a:buNone/>
             </a:pPr>
             <a:r>
@@ -2291,6 +2155,13 @@
             <a:prstDash val="solid"/>
           </a:ln>
         </p:spPr>
+        <p:txBody>
+          <a:bodyPr/>
+          <a:lstStyle/>
+          <a:p>
+            <a:endParaRPr lang="fr-FR"/>
+          </a:p>
+        </p:txBody>
       </p:sp>
       <p:sp>
         <p:nvSpPr>
@@ -2313,7 +2184,7 @@
           <a:bodyPr wrap="square" lIns="0" tIns="0" rIns="0" bIns="0" rtlCol="0" anchor="ctr"/>
           <a:lstStyle/>
           <a:p>
-            <a:pPr indent="0" marL="0">
+            <a:pPr marL="0" indent="0">
               <a:buNone/>
             </a:pPr>
             <a:r>
@@ -2350,6 +2221,13 @@
             <a:prstDash val="solid"/>
           </a:ln>
         </p:spPr>
+        <p:txBody>
+          <a:bodyPr/>
+          <a:lstStyle/>
+          <a:p>
+            <a:endParaRPr lang="fr-FR"/>
+          </a:p>
+        </p:txBody>
       </p:sp>
       <p:sp>
         <p:nvSpPr>
@@ -2372,7 +2250,7 @@
           <a:bodyPr wrap="square" lIns="0" tIns="0" rIns="0" bIns="0" rtlCol="0" anchor="ctr"/>
           <a:lstStyle/>
           <a:p>
-            <a:pPr indent="0" marL="0">
+            <a:pPr marL="0" indent="0">
               <a:buNone/>
             </a:pPr>
             <a:r>
@@ -2408,7 +2286,7 @@
           <a:bodyPr wrap="square" lIns="0" tIns="0" rIns="0" bIns="0" rtlCol="0" anchor="ctr"/>
           <a:lstStyle/>
           <a:p>
-            <a:pPr indent="0" marL="0">
+            <a:pPr marL="0" indent="0">
               <a:buNone/>
             </a:pPr>
             <a:r>
@@ -2447,6 +2325,13 @@
             <a:prstDash val="solid"/>
           </a:ln>
         </p:spPr>
+        <p:txBody>
+          <a:bodyPr/>
+          <a:lstStyle/>
+          <a:p>
+            <a:endParaRPr lang="fr-FR"/>
+          </a:p>
+        </p:txBody>
       </p:sp>
       <p:sp>
         <p:nvSpPr>
@@ -2469,7 +2354,7 @@
           <a:bodyPr wrap="square" lIns="0" tIns="0" rIns="0" bIns="0" rtlCol="0" anchor="ctr"/>
           <a:lstStyle/>
           <a:p>
-            <a:pPr indent="0" marL="0">
+            <a:pPr marL="0" indent="0">
               <a:buNone/>
             </a:pPr>
             <a:r>
@@ -2506,6 +2391,13 @@
             <a:prstDash val="solid"/>
           </a:ln>
         </p:spPr>
+        <p:txBody>
+          <a:bodyPr/>
+          <a:lstStyle/>
+          <a:p>
+            <a:endParaRPr lang="fr-FR"/>
+          </a:p>
+        </p:txBody>
       </p:sp>
       <p:sp>
         <p:nvSpPr>
@@ -2528,7 +2420,7 @@
           <a:bodyPr wrap="square" lIns="0" tIns="0" rIns="0" bIns="0" rtlCol="0" anchor="ctr"/>
           <a:lstStyle/>
           <a:p>
-            <a:pPr indent="0" marL="0">
+            <a:pPr marL="0" indent="0">
               <a:buNone/>
             </a:pPr>
             <a:r>
@@ -2564,7 +2456,7 @@
           <a:bodyPr wrap="square" lIns="0" tIns="0" rIns="0" bIns="0" rtlCol="0" anchor="ctr"/>
           <a:lstStyle/>
           <a:p>
-            <a:pPr indent="0" marL="0">
+            <a:pPr marL="0" indent="0">
               <a:buNone/>
             </a:pPr>
             <a:r>
@@ -2603,6 +2495,13 @@
             <a:prstDash val="solid"/>
           </a:ln>
         </p:spPr>
+        <p:txBody>
+          <a:bodyPr/>
+          <a:lstStyle/>
+          <a:p>
+            <a:endParaRPr lang="fr-FR"/>
+          </a:p>
+        </p:txBody>
       </p:sp>
       <p:sp>
         <p:nvSpPr>
@@ -2625,7 +2524,7 @@
           <a:bodyPr wrap="square" lIns="0" tIns="0" rIns="0" bIns="0" rtlCol="0" anchor="ctr"/>
           <a:lstStyle/>
           <a:p>
-            <a:pPr indent="0" marL="0">
+            <a:pPr marL="0" indent="0">
               <a:buNone/>
             </a:pPr>
             <a:r>
@@ -2662,6 +2561,13 @@
             <a:prstDash val="solid"/>
           </a:ln>
         </p:spPr>
+        <p:txBody>
+          <a:bodyPr/>
+          <a:lstStyle/>
+          <a:p>
+            <a:endParaRPr lang="fr-FR"/>
+          </a:p>
+        </p:txBody>
       </p:sp>
       <p:sp>
         <p:nvSpPr>
@@ -2684,7 +2590,7 @@
           <a:bodyPr wrap="square" lIns="0" tIns="0" rIns="0" bIns="0" rtlCol="0" anchor="ctr"/>
           <a:lstStyle/>
           <a:p>
-            <a:pPr indent="0" marL="0">
+            <a:pPr marL="0" indent="0">
               <a:buNone/>
             </a:pPr>
             <a:r>
@@ -2720,7 +2626,7 @@
           <a:bodyPr wrap="square" lIns="0" tIns="0" rIns="0" bIns="0" rtlCol="0" anchor="ctr"/>
           <a:lstStyle/>
           <a:p>
-            <a:pPr indent="0" marL="0">
+            <a:pPr marL="0" indent="0">
               <a:buNone/>
             </a:pPr>
             <a:r>
@@ -2759,6 +2665,13 @@
             <a:prstDash val="solid"/>
           </a:ln>
         </p:spPr>
+        <p:txBody>
+          <a:bodyPr/>
+          <a:lstStyle/>
+          <a:p>
+            <a:endParaRPr lang="fr-FR"/>
+          </a:p>
+        </p:txBody>
       </p:sp>
       <p:sp>
         <p:nvSpPr>
@@ -2781,7 +2694,7 @@
           <a:bodyPr wrap="square" lIns="0" tIns="0" rIns="0" bIns="0" rtlCol="0" anchor="ctr"/>
           <a:lstStyle/>
           <a:p>
-            <a:pPr indent="0" marL="0">
+            <a:pPr marL="0" indent="0">
               <a:buNone/>
             </a:pPr>
             <a:r>
@@ -2818,6 +2731,13 @@
             <a:prstDash val="solid"/>
           </a:ln>
         </p:spPr>
+        <p:txBody>
+          <a:bodyPr/>
+          <a:lstStyle/>
+          <a:p>
+            <a:endParaRPr lang="fr-FR"/>
+          </a:p>
+        </p:txBody>
       </p:sp>
       <p:sp>
         <p:nvSpPr>
@@ -2840,7 +2760,7 @@
           <a:bodyPr wrap="square" lIns="0" tIns="0" rIns="0" bIns="0" rtlCol="0" anchor="ctr"/>
           <a:lstStyle/>
           <a:p>
-            <a:pPr indent="0" marL="0">
+            <a:pPr marL="0" indent="0">
               <a:buNone/>
             </a:pPr>
             <a:r>
@@ -2876,7 +2796,7 @@
           <a:bodyPr wrap="square" lIns="0" tIns="0" rIns="0" bIns="0" rtlCol="0" anchor="ctr"/>
           <a:lstStyle/>
           <a:p>
-            <a:pPr indent="0" marL="0">
+            <a:pPr marL="0" indent="0">
               <a:buNone/>
             </a:pPr>
             <a:r>
@@ -2915,6 +2835,13 @@
             <a:prstDash val="solid"/>
           </a:ln>
         </p:spPr>
+        <p:txBody>
+          <a:bodyPr/>
+          <a:lstStyle/>
+          <a:p>
+            <a:endParaRPr lang="fr-FR"/>
+          </a:p>
+        </p:txBody>
       </p:sp>
       <p:sp>
         <p:nvSpPr>
@@ -2937,16 +2864,16 @@
           <a:bodyPr wrap="square" lIns="0" tIns="0" rIns="0" bIns="0" rtlCol="0" anchor="ctr"/>
           <a:lstStyle/>
           <a:p>
-            <a:pPr indent="0" marL="0">
-              <a:buNone/>
-            </a:pPr>
-            <a:r>
-              <a:rPr lang="en-US" sz="1200" b="1" dirty="0">
+            <a:pPr marL="0" indent="0">
+              <a:buNone/>
+            </a:pPr>
+            <a:r>
+              <a:rPr lang="fr-FR" sz="1200" b="1">
                 <a:solidFill>
                   <a:srgbClr val="42C6D8"/>
                 </a:solidFill>
               </a:rPr>
-              <a:t>05</a:t>
+              <a:t>Un projet centré sur les cinq demandes du sujet.</a:t>
             </a:r>
             <a:endParaRPr lang="en-US" sz="1200" dirty="0"/>
           </a:p>
@@ -2974,6 +2901,13 @@
             <a:prstDash val="solid"/>
           </a:ln>
         </p:spPr>
+        <p:txBody>
+          <a:bodyPr/>
+          <a:lstStyle/>
+          <a:p>
+            <a:endParaRPr lang="fr-FR"/>
+          </a:p>
+        </p:txBody>
       </p:sp>
       <p:sp>
         <p:nvSpPr>
@@ -2996,7 +2930,7 @@
           <a:bodyPr wrap="square" lIns="0" tIns="0" rIns="0" bIns="0" rtlCol="0" anchor="ctr"/>
           <a:lstStyle/>
           <a:p>
-            <a:pPr indent="0" marL="0">
+            <a:pPr marL="0" indent="0">
               <a:buNone/>
             </a:pPr>
             <a:r>
@@ -3032,7 +2966,7 @@
           <a:bodyPr wrap="square" lIns="0" tIns="0" rIns="0" bIns="0" rtlCol="0" anchor="ctr"/>
           <a:lstStyle/>
           <a:p>
-            <a:pPr indent="0" marL="0">
+            <a:pPr marL="0" indent="0">
               <a:buNone/>
             </a:pPr>
             <a:r>
@@ -3068,16 +3002,16 @@
           <a:bodyPr wrap="square" lIns="0" tIns="0" rIns="0" bIns="0" rtlCol="0" anchor="ctr"/>
           <a:lstStyle/>
           <a:p>
-            <a:pPr algn="ctr" indent="0" marL="0">
-              <a:buNone/>
-            </a:pPr>
-            <a:r>
-              <a:rPr lang="en-US" sz="2100" b="1" dirty="0">
+            <a:pPr marL="0" indent="0" algn="ctr">
+              <a:buNone/>
+            </a:pPr>
+            <a:r>
+              <a:rPr lang="fr-FR" sz="2100" b="1">
                 <a:solidFill>
                   <a:srgbClr val="F6F8FB"/>
                 </a:solidFill>
               </a:rPr>
-              <a:t>Résultat : un dépôt rejouable, documenté et validé.</a:t>
+              <a:t>Un projet centré sur les cinq demandes du sujet.</a:t>
             </a:r>
             <a:endParaRPr lang="en-US" sz="2100" dirty="0"/>
           </a:p>
@@ -3099,6 +3033,7 @@
         <a:solidFill>
           <a:srgbClr val="101B2D"/>
         </a:solidFill>
+        <a:effectLst/>
       </p:bgPr>
     </p:bg>
     <p:spTree>
@@ -3139,6 +3074,13 @@
             <a:prstDash val="solid"/>
           </a:ln>
         </p:spPr>
+        <p:txBody>
+          <a:bodyPr/>
+          <a:lstStyle/>
+          <a:p>
+            <a:endParaRPr lang="fr-FR"/>
+          </a:p>
+        </p:txBody>
       </p:sp>
       <p:sp>
         <p:nvSpPr>
@@ -3161,16 +3103,16 @@
           <a:bodyPr wrap="square" lIns="0" tIns="0" rIns="0" bIns="0" rtlCol="0" anchor="ctr"/>
           <a:lstStyle/>
           <a:p>
-            <a:pPr indent="0" marL="0">
-              <a:buNone/>
-            </a:pPr>
-            <a:r>
-              <a:rPr lang="en-US" sz="1000" b="1" spc="200" kern="0" dirty="0">
+            <a:pPr marL="0" indent="0">
+              <a:buNone/>
+            </a:pPr>
+            <a:r>
+              <a:rPr lang="en-US" sz="1000" b="1" kern="0" spc="200">
                 <a:solidFill>
                   <a:srgbClr val="42C6D8"/>
                 </a:solidFill>
               </a:rPr>
-              <a:t>MODÈLE</a:t>
+              <a:t>EXERCICE 1 · MODÈLE</a:t>
             </a:r>
             <a:endParaRPr lang="en-US" sz="1000" dirty="0"/>
           </a:p>
@@ -3197,7 +3139,7 @@
           <a:bodyPr wrap="square" lIns="0" tIns="0" rIns="0" bIns="0" rtlCol="0" anchor="ctr"/>
           <a:lstStyle/>
           <a:p>
-            <a:pPr indent="0" marL="0">
+            <a:pPr marL="0" indent="0">
               <a:buNone/>
             </a:pPr>
             <a:r>
@@ -3233,7 +3175,7 @@
           <a:bodyPr wrap="square" lIns="0" tIns="0" rIns="0" bIns="0" rtlCol="0" anchor="ctr"/>
           <a:lstStyle/>
           <a:p>
-            <a:pPr indent="0" marL="0">
+            <a:pPr marL="0" indent="0">
               <a:buNone/>
             </a:pPr>
             <a:r>
@@ -3269,7 +3211,7 @@
           <a:bodyPr wrap="square" lIns="0" tIns="0" rIns="0" bIns="0" rtlCol="0" anchor="ctr"/>
           <a:lstStyle/>
           <a:p>
-            <a:pPr algn="r" indent="0" marL="0">
+            <a:pPr marL="0" indent="0" algn="r">
               <a:buNone/>
             </a:pPr>
             <a:r>
@@ -3306,6 +3248,13 @@
             <a:prstDash val="solid"/>
           </a:ln>
         </p:spPr>
+        <p:txBody>
+          <a:bodyPr/>
+          <a:lstStyle/>
+          <a:p>
+            <a:endParaRPr lang="fr-FR"/>
+          </a:p>
+        </p:txBody>
       </p:sp>
       <p:sp>
         <p:nvSpPr>
@@ -3333,6 +3282,13 @@
             <a:prstDash val="solid"/>
           </a:ln>
         </p:spPr>
+        <p:txBody>
+          <a:bodyPr/>
+          <a:lstStyle/>
+          <a:p>
+            <a:endParaRPr lang="fr-FR"/>
+          </a:p>
+        </p:txBody>
       </p:sp>
       <p:sp>
         <p:nvSpPr>
@@ -3358,6 +3314,13 @@
             <a:prstDash val="solid"/>
           </a:ln>
         </p:spPr>
+        <p:txBody>
+          <a:bodyPr/>
+          <a:lstStyle/>
+          <a:p>
+            <a:endParaRPr lang="fr-FR"/>
+          </a:p>
+        </p:txBody>
       </p:sp>
       <p:sp>
         <p:nvSpPr>
@@ -3380,7 +3343,7 @@
           <a:bodyPr wrap="square" lIns="0" tIns="0" rIns="0" bIns="0" rtlCol="0" anchor="ctr"/>
           <a:lstStyle/>
           <a:p>
-            <a:pPr indent="0" marL="0">
+            <a:pPr marL="0" indent="0">
               <a:buNone/>
             </a:pPr>
             <a:r>
@@ -3417,45 +3380,22 @@
           <a:lstStyle/>
           <a:p>
             <a:r>
-              <a:rPr lang="en-US" sz="1150" dirty="0">
+              <a:rPr lang="en-US" sz="1150">
                 <a:solidFill>
                   <a:srgbClr val="A9B8C9"/>
                 </a:solidFill>
               </a:rPr>
               <a:t>id_etudiant  PK</a:t>
             </a:r>
-            <a:endParaRPr lang="en-US" sz="1150" dirty="0"/>
-          </a:p>
-          <a:p>
-            <a:r>
-              <a:rPr lang="en-US" sz="1150" dirty="0">
+          </a:p>
+          <a:p>
+            <a:r>
+              <a:rPr lang="en-US" sz="1150">
                 <a:solidFill>
                   <a:srgbClr val="A9B8C9"/>
                 </a:solidFill>
               </a:rPr>
               <a:t>nom · prenom</a:t>
-            </a:r>
-            <a:endParaRPr lang="en-US" sz="1150" dirty="0"/>
-          </a:p>
-          <a:p>
-            <a:r>
-              <a:rPr lang="en-US" sz="1150" dirty="0">
-                <a:solidFill>
-                  <a:srgbClr val="A9B8C9"/>
-                </a:solidFill>
-              </a:rPr>
-              <a:t>email  UNIQUE</a:t>
-            </a:r>
-            <a:endParaRPr lang="en-US" sz="1150" dirty="0"/>
-          </a:p>
-          <a:p>
-            <a:r>
-              <a:rPr lang="en-US" sz="1150" dirty="0">
-                <a:solidFill>
-                  <a:srgbClr val="A9B8C9"/>
-                </a:solidFill>
-              </a:rPr>
-              <a:t>groupe</a:t>
             </a:r>
             <a:endParaRPr lang="en-US" sz="1150" dirty="0"/>
           </a:p>
@@ -3487,6 +3427,13 @@
             <a:prstDash val="solid"/>
           </a:ln>
         </p:spPr>
+        <p:txBody>
+          <a:bodyPr/>
+          <a:lstStyle/>
+          <a:p>
+            <a:endParaRPr lang="fr-FR"/>
+          </a:p>
+        </p:txBody>
       </p:sp>
       <p:sp>
         <p:nvSpPr>
@@ -3512,6 +3459,13 @@
             <a:prstDash val="solid"/>
           </a:ln>
         </p:spPr>
+        <p:txBody>
+          <a:bodyPr/>
+          <a:lstStyle/>
+          <a:p>
+            <a:endParaRPr lang="fr-FR"/>
+          </a:p>
+        </p:txBody>
       </p:sp>
       <p:sp>
         <p:nvSpPr>
@@ -3534,7 +3488,7 @@
           <a:bodyPr wrap="square" lIns="0" tIns="0" rIns="0" bIns="0" rtlCol="0" anchor="ctr"/>
           <a:lstStyle/>
           <a:p>
-            <a:pPr indent="0" marL="0">
+            <a:pPr marL="0" indent="0">
               <a:buNone/>
             </a:pPr>
             <a:r>
@@ -3571,56 +3525,42 @@
           <a:lstStyle/>
           <a:p>
             <a:r>
-              <a:rPr lang="en-US" sz="1150" dirty="0">
+              <a:rPr lang="en-US" sz="1150">
                 <a:solidFill>
                   <a:srgbClr val="A9B8C9"/>
                 </a:solidFill>
               </a:rPr>
               <a:t>id_note  PK</a:t>
             </a:r>
-            <a:endParaRPr lang="en-US" sz="1150" dirty="0"/>
-          </a:p>
-          <a:p>
-            <a:r>
-              <a:rPr lang="en-US" sz="1150" dirty="0">
+          </a:p>
+          <a:p>
+            <a:r>
+              <a:rPr lang="en-US" sz="1150">
                 <a:solidFill>
                   <a:srgbClr val="A9B8C9"/>
                 </a:solidFill>
               </a:rPr>
               <a:t>id_etudiant  FK</a:t>
             </a:r>
-            <a:endParaRPr lang="en-US" sz="1150" dirty="0"/>
-          </a:p>
-          <a:p>
-            <a:r>
-              <a:rPr lang="en-US" sz="1150" dirty="0">
+          </a:p>
+          <a:p>
+            <a:r>
+              <a:rPr lang="en-US" sz="1150">
                 <a:solidFill>
                   <a:srgbClr val="A9B8C9"/>
                 </a:solidFill>
               </a:rPr>
               <a:t>id_matiere  FK</a:t>
             </a:r>
-            <a:endParaRPr lang="en-US" sz="1150" dirty="0"/>
-          </a:p>
-          <a:p>
-            <a:r>
-              <a:rPr lang="en-US" sz="1150" dirty="0">
+          </a:p>
+          <a:p>
+            <a:r>
+              <a:rPr lang="en-US" sz="1150">
                 <a:solidFill>
                   <a:srgbClr val="A9B8C9"/>
                 </a:solidFill>
               </a:rPr>
-              <a:t>note  CHECK 0–20</a:t>
-            </a:r>
-            <a:endParaRPr lang="en-US" sz="1150" dirty="0"/>
-          </a:p>
-          <a:p>
-            <a:r>
-              <a:rPr lang="en-US" sz="1150" dirty="0">
-                <a:solidFill>
-                  <a:srgbClr val="A9B8C9"/>
-                </a:solidFill>
-              </a:rPr>
-              <a:t>date_evaluation</a:t>
+              <a:t>note</a:t>
             </a:r>
             <a:endParaRPr lang="en-US" sz="1150" dirty="0"/>
           </a:p>
@@ -3652,6 +3592,13 @@
             <a:prstDash val="solid"/>
           </a:ln>
         </p:spPr>
+        <p:txBody>
+          <a:bodyPr/>
+          <a:lstStyle/>
+          <a:p>
+            <a:endParaRPr lang="fr-FR"/>
+          </a:p>
+        </p:txBody>
       </p:sp>
       <p:sp>
         <p:nvSpPr>
@@ -3677,6 +3624,13 @@
             <a:prstDash val="solid"/>
           </a:ln>
         </p:spPr>
+        <p:txBody>
+          <a:bodyPr/>
+          <a:lstStyle/>
+          <a:p>
+            <a:endParaRPr lang="fr-FR"/>
+          </a:p>
+        </p:txBody>
       </p:sp>
       <p:sp>
         <p:nvSpPr>
@@ -3699,7 +3653,7 @@
           <a:bodyPr wrap="square" lIns="0" tIns="0" rIns="0" bIns="0" rtlCol="0" anchor="ctr"/>
           <a:lstStyle/>
           <a:p>
-            <a:pPr indent="0" marL="0">
+            <a:pPr marL="0" indent="0">
               <a:buNone/>
             </a:pPr>
             <a:r>
@@ -3736,34 +3690,22 @@
           <a:lstStyle/>
           <a:p>
             <a:r>
-              <a:rPr lang="en-US" sz="1150" dirty="0">
+              <a:rPr lang="en-US" sz="1150">
                 <a:solidFill>
                   <a:srgbClr val="A9B8C9"/>
                 </a:solidFill>
               </a:rPr>
               <a:t>id_matiere  PK</a:t>
             </a:r>
-            <a:endParaRPr lang="en-US" sz="1150" dirty="0"/>
-          </a:p>
-          <a:p>
-            <a:r>
-              <a:rPr lang="en-US" sz="1150" dirty="0">
+          </a:p>
+          <a:p>
+            <a:r>
+              <a:rPr lang="en-US" sz="1150">
                 <a:solidFill>
                   <a:srgbClr val="A9B8C9"/>
                 </a:solidFill>
               </a:rPr>
               <a:t>libelle</a:t>
-            </a:r>
-            <a:endParaRPr lang="en-US" sz="1150" dirty="0"/>
-          </a:p>
-          <a:p>
-            <a:r>
-              <a:rPr lang="en-US" sz="1150" dirty="0">
-                <a:solidFill>
-                  <a:srgbClr val="A9B8C9"/>
-                </a:solidFill>
-              </a:rPr>
-              <a:t>coefficient  CHECK &gt; 0</a:t>
             </a:r>
             <a:endParaRPr lang="en-US" sz="1150" dirty="0"/>
           </a:p>
@@ -3793,6 +3735,13 @@
             <a:prstDash val="solid"/>
           </a:ln>
         </p:spPr>
+        <p:txBody>
+          <a:bodyPr/>
+          <a:lstStyle/>
+          <a:p>
+            <a:endParaRPr lang="fr-FR"/>
+          </a:p>
+        </p:txBody>
       </p:sp>
       <p:sp>
         <p:nvSpPr>
@@ -3818,6 +3767,13 @@
             <a:prstDash val="solid"/>
           </a:ln>
         </p:spPr>
+        <p:txBody>
+          <a:bodyPr/>
+          <a:lstStyle/>
+          <a:p>
+            <a:endParaRPr lang="fr-FR"/>
+          </a:p>
+        </p:txBody>
       </p:sp>
       <p:sp>
         <p:nvSpPr>
@@ -3840,16 +3796,16 @@
           <a:bodyPr wrap="square" lIns="0" tIns="0" rIns="0" bIns="0" rtlCol="0" anchor="ctr"/>
           <a:lstStyle/>
           <a:p>
-            <a:pPr algn="ctr" indent="0" marL="0">
-              <a:buNone/>
-            </a:pPr>
-            <a:r>
-              <a:rPr lang="en-US" sz="1100" b="1" dirty="0">
+            <a:pPr marL="0" indent="0" algn="ctr">
+              <a:buNone/>
+            </a:pPr>
+            <a:r>
+              <a:rPr lang="en-US" sz="1100" b="1">
                 <a:solidFill>
                   <a:srgbClr val="EF7B79"/>
                 </a:solidFill>
               </a:rPr>
-              <a:t>ON DELETE CASCADE</a:t>
+              <a:t>CLÉS ÉTRANGÈRES</a:t>
             </a:r>
             <a:endParaRPr lang="en-US" sz="1100" dirty="0"/>
           </a:p>
@@ -3871,6 +3827,7 @@
         <a:solidFill>
           <a:srgbClr val="101B2D"/>
         </a:solidFill>
+        <a:effectLst/>
       </p:bgPr>
     </p:bg>
     <p:spTree>
@@ -3911,6 +3868,13 @@
             <a:prstDash val="solid"/>
           </a:ln>
         </p:spPr>
+        <p:txBody>
+          <a:bodyPr/>
+          <a:lstStyle/>
+          <a:p>
+            <a:endParaRPr lang="fr-FR"/>
+          </a:p>
+        </p:txBody>
       </p:sp>
       <p:sp>
         <p:nvSpPr>
@@ -3933,16 +3897,16 @@
           <a:bodyPr wrap="square" lIns="0" tIns="0" rIns="0" bIns="0" rtlCol="0" anchor="ctr"/>
           <a:lstStyle/>
           <a:p>
-            <a:pPr indent="0" marL="0">
-              <a:buNone/>
-            </a:pPr>
-            <a:r>
-              <a:rPr lang="en-US" sz="1000" b="1" spc="200" kern="0" dirty="0">
+            <a:pPr marL="0" indent="0">
+              <a:buNone/>
+            </a:pPr>
+            <a:r>
+              <a:rPr lang="en-US" sz="1000" b="1" kern="0" spc="200">
                 <a:solidFill>
                   <a:srgbClr val="42C6D8"/>
                 </a:solidFill>
               </a:rPr>
-              <a:t>MULTILINGUE</a:t>
+              <a:t>EXERCICE 1 · MULTILINGUE</a:t>
             </a:r>
             <a:endParaRPr lang="en-US" sz="1000" dirty="0"/>
           </a:p>
@@ -3969,16 +3933,16 @@
           <a:bodyPr wrap="square" lIns="0" tIns="0" rIns="0" bIns="0" rtlCol="0" anchor="ctr"/>
           <a:lstStyle/>
           <a:p>
-            <a:pPr indent="0" marL="0">
-              <a:buNone/>
-            </a:pPr>
-            <a:r>
-              <a:rPr lang="en-US" sz="2800" b="1" dirty="0">
+            <a:pPr marL="0" indent="0">
+              <a:buNone/>
+            </a:pPr>
+            <a:r>
+              <a:rPr lang="fr-FR" sz="2800" b="1">
                 <a:solidFill>
                   <a:srgbClr val="F6F8FB"/>
                 </a:solidFill>
               </a:rPr>
-              <a:t>UTF-8 conserve les caractères ; ICU fr-FR rend le tri pertinent.</a:t>
+              <a:t>UTF-8 conserve les caractères ; la collation française permet de les trier.</a:t>
             </a:r>
             <a:endParaRPr lang="en-US" sz="2800" dirty="0"/>
           </a:p>
@@ -4005,16 +3969,16 @@
           <a:bodyPr wrap="square" lIns="0" tIns="0" rIns="0" bIns="0" rtlCol="0" anchor="ctr"/>
           <a:lstStyle/>
           <a:p>
-            <a:pPr indent="0" marL="0">
-              <a:buNone/>
-            </a:pPr>
-            <a:r>
-              <a:rPr lang="en-US" sz="1300" dirty="0">
+            <a:pPr marL="0" indent="0">
+              <a:buNone/>
+            </a:pPr>
+            <a:r>
+              <a:rPr lang="fr-FR" sz="1300">
                 <a:solidFill>
                   <a:srgbClr val="A9B8C9"/>
                 </a:solidFill>
               </a:rPr>
-              <a:t>Le projet démontre les accents français ainsi que des écritures chinoises et arabes.</a:t>
+              <a:t>Résultat obtenu après ORDER BY nom :</a:t>
             </a:r>
             <a:endParaRPr lang="en-US" sz="1300" dirty="0"/>
           </a:p>
@@ -4041,7 +4005,7 @@
           <a:bodyPr wrap="square" lIns="0" tIns="0" rIns="0" bIns="0" rtlCol="0" anchor="ctr"/>
           <a:lstStyle/>
           <a:p>
-            <a:pPr algn="r" indent="0" marL="0">
+            <a:pPr marL="0" indent="0" algn="r">
               <a:buNone/>
             </a:pPr>
             <a:r>
@@ -4078,6 +4042,13 @@
             <a:prstDash val="solid"/>
           </a:ln>
         </p:spPr>
+        <p:txBody>
+          <a:bodyPr/>
+          <a:lstStyle/>
+          <a:p>
+            <a:endParaRPr lang="fr-FR"/>
+          </a:p>
+        </p:txBody>
       </p:sp>
       <p:sp>
         <p:nvSpPr>
@@ -4105,6 +4076,13 @@
             <a:prstDash val="solid"/>
           </a:ln>
         </p:spPr>
+        <p:txBody>
+          <a:bodyPr/>
+          <a:lstStyle/>
+          <a:p>
+            <a:endParaRPr lang="fr-FR"/>
+          </a:p>
+        </p:txBody>
       </p:sp>
       <p:sp>
         <p:nvSpPr>
@@ -4127,16 +4105,16 @@
           <a:bodyPr wrap="square" lIns="0" tIns="0" rIns="0" bIns="0" rtlCol="0" anchor="ctr"/>
           <a:lstStyle/>
           <a:p>
-            <a:pPr indent="0" marL="0">
-              <a:buNone/>
-            </a:pPr>
-            <a:r>
-              <a:rPr lang="en-US" sz="1000" b="1" dirty="0">
+            <a:pPr marL="0" indent="0">
+              <a:buNone/>
+            </a:pPr>
+            <a:r>
+              <a:rPr lang="en-US" sz="1000" b="1">
                 <a:solidFill>
                   <a:srgbClr val="42C6D8"/>
                 </a:solidFill>
               </a:rPr>
-              <a:t>FR</a:t>
+              <a:t>01</a:t>
             </a:r>
             <a:endParaRPr lang="en-US" sz="1000" dirty="0"/>
           </a:p>
@@ -4163,16 +4141,16 @@
           <a:bodyPr wrap="square" lIns="0" tIns="0" rIns="0" bIns="0" rtlCol="0" anchor="ctr"/>
           <a:lstStyle/>
           <a:p>
-            <a:pPr indent="0" marL="0">
-              <a:buNone/>
-            </a:pPr>
-            <a:r>
-              <a:rPr lang="en-US" sz="1600" b="1" dirty="0">
+            <a:pPr marL="0" indent="0">
+              <a:buNone/>
+            </a:pPr>
+            <a:r>
+              <a:rPr lang="en-US" sz="1600" b="1">
                 <a:solidFill>
                   <a:srgbClr val="F6F8FB"/>
                 </a:solidFill>
               </a:rPr>
-              <a:t>Évrard  Chloé</a:t>
+              <a:t>Béranger  Léo</a:t>
             </a:r>
             <a:endParaRPr lang="en-US" sz="1600" dirty="0"/>
           </a:p>
@@ -4204,6 +4182,13 @@
             <a:prstDash val="solid"/>
           </a:ln>
         </p:spPr>
+        <p:txBody>
+          <a:bodyPr/>
+          <a:lstStyle/>
+          <a:p>
+            <a:endParaRPr lang="fr-FR"/>
+          </a:p>
+        </p:txBody>
       </p:sp>
       <p:sp>
         <p:nvSpPr>
@@ -4226,16 +4211,16 @@
           <a:bodyPr wrap="square" lIns="0" tIns="0" rIns="0" bIns="0" rtlCol="0" anchor="ctr"/>
           <a:lstStyle/>
           <a:p>
-            <a:pPr indent="0" marL="0">
-              <a:buNone/>
-            </a:pPr>
-            <a:r>
-              <a:rPr lang="en-US" sz="1000" b="1" dirty="0">
+            <a:pPr marL="0" indent="0">
+              <a:buNone/>
+            </a:pPr>
+            <a:r>
+              <a:rPr lang="en-US" sz="1000" b="1">
                 <a:solidFill>
                   <a:srgbClr val="73D7B0"/>
                 </a:solidFill>
               </a:rPr>
-              <a:t>FR</a:t>
+              <a:t>02</a:t>
             </a:r>
             <a:endParaRPr lang="en-US" sz="1000" dirty="0"/>
           </a:p>
@@ -4262,16 +4247,16 @@
           <a:bodyPr wrap="square" lIns="0" tIns="0" rIns="0" bIns="0" rtlCol="0" anchor="ctr"/>
           <a:lstStyle/>
           <a:p>
-            <a:pPr indent="0" marL="0">
-              <a:buNone/>
-            </a:pPr>
-            <a:r>
-              <a:rPr lang="en-US" sz="1600" b="1" dirty="0">
+            <a:pPr marL="0" indent="0">
+              <a:buNone/>
+            </a:pPr>
+            <a:r>
+              <a:rPr lang="en-US" sz="1600" b="1">
                 <a:solidFill>
                   <a:srgbClr val="F6F8FB"/>
                 </a:solidFill>
               </a:rPr>
-              <a:t>Noël  Anaïs</a:t>
+              <a:t>Çağlar  Émile</a:t>
             </a:r>
             <a:endParaRPr lang="en-US" sz="1600" dirty="0"/>
           </a:p>
@@ -4303,6 +4288,13 @@
             <a:prstDash val="solid"/>
           </a:ln>
         </p:spPr>
+        <p:txBody>
+          <a:bodyPr/>
+          <a:lstStyle/>
+          <a:p>
+            <a:endParaRPr lang="fr-FR"/>
+          </a:p>
+        </p:txBody>
       </p:sp>
       <p:sp>
         <p:nvSpPr>
@@ -4325,16 +4317,16 @@
           <a:bodyPr wrap="square" lIns="0" tIns="0" rIns="0" bIns="0" rtlCol="0" anchor="ctr"/>
           <a:lstStyle/>
           <a:p>
-            <a:pPr indent="0" marL="0">
-              <a:buNone/>
-            </a:pPr>
-            <a:r>
-              <a:rPr lang="en-US" sz="1000" b="1" dirty="0">
+            <a:pPr marL="0" indent="0">
+              <a:buNone/>
+            </a:pPr>
+            <a:r>
+              <a:rPr lang="en-US" sz="1000" b="1">
                 <a:solidFill>
                   <a:srgbClr val="F0B35B"/>
                 </a:solidFill>
               </a:rPr>
-              <a:t>ZH</a:t>
+              <a:t>03</a:t>
             </a:r>
             <a:endParaRPr lang="en-US" sz="1000" dirty="0"/>
           </a:p>
@@ -4361,16 +4353,16 @@
           <a:bodyPr wrap="square" lIns="0" tIns="0" rIns="0" bIns="0" rtlCol="0" anchor="ctr"/>
           <a:lstStyle/>
           <a:p>
-            <a:pPr indent="0" marL="0">
-              <a:buNone/>
-            </a:pPr>
-            <a:r>
-              <a:rPr lang="en-US" sz="1600" b="1" dirty="0">
+            <a:pPr marL="0" indent="0">
+              <a:buNone/>
+            </a:pPr>
+            <a:r>
+              <a:rPr lang="en-US" sz="1600" b="1">
                 <a:solidFill>
                   <a:srgbClr val="F6F8FB"/>
                 </a:solidFill>
               </a:rPr>
-              <a:t>李  梅</a:t>
+              <a:t>Durand  Zoé</a:t>
             </a:r>
             <a:endParaRPr lang="en-US" sz="1600" dirty="0"/>
           </a:p>
@@ -4402,6 +4394,13 @@
             <a:prstDash val="solid"/>
           </a:ln>
         </p:spPr>
+        <p:txBody>
+          <a:bodyPr/>
+          <a:lstStyle/>
+          <a:p>
+            <a:endParaRPr lang="fr-FR"/>
+          </a:p>
+        </p:txBody>
       </p:sp>
       <p:sp>
         <p:nvSpPr>
@@ -4424,16 +4423,16 @@
           <a:bodyPr wrap="square" lIns="0" tIns="0" rIns="0" bIns="0" rtlCol="0" anchor="ctr"/>
           <a:lstStyle/>
           <a:p>
-            <a:pPr indent="0" marL="0">
-              <a:buNone/>
-            </a:pPr>
-            <a:r>
-              <a:rPr lang="en-US" sz="1000" b="1" dirty="0">
+            <a:pPr marL="0" indent="0">
+              <a:buNone/>
+            </a:pPr>
+            <a:r>
+              <a:rPr lang="en-US" sz="1000" b="1">
                 <a:solidFill>
                   <a:srgbClr val="EF7B79"/>
                 </a:solidFill>
               </a:rPr>
-              <a:t>AR</a:t>
+              <a:t>04</a:t>
             </a:r>
             <a:endParaRPr lang="en-US" sz="1000" dirty="0"/>
           </a:p>
@@ -4460,16 +4459,16 @@
           <a:bodyPr wrap="square" lIns="0" tIns="0" rIns="0" bIns="0" rtlCol="0" anchor="ctr"/>
           <a:lstStyle/>
           <a:p>
-            <a:pPr indent="0" marL="0">
-              <a:buNone/>
-            </a:pPr>
-            <a:r>
-              <a:rPr lang="en-US" sz="1600" b="1" dirty="0">
+            <a:pPr marL="0" indent="0">
+              <a:buNone/>
+            </a:pPr>
+            <a:r>
+              <a:rPr lang="en-US" sz="1600" b="1">
                 <a:solidFill>
                   <a:srgbClr val="F6F8FB"/>
                 </a:solidFill>
               </a:rPr>
-              <a:t>العلمي  ليلى</a:t>
+              <a:t>Évrard  Chloé</a:t>
             </a:r>
             <a:endParaRPr lang="en-US" sz="1600" dirty="0"/>
           </a:p>
@@ -4501,6 +4500,13 @@
             <a:prstDash val="solid"/>
           </a:ln>
         </p:spPr>
+        <p:txBody>
+          <a:bodyPr/>
+          <a:lstStyle/>
+          <a:p>
+            <a:endParaRPr lang="fr-FR"/>
+          </a:p>
+        </p:txBody>
       </p:sp>
       <p:sp>
         <p:nvSpPr>
@@ -4523,7 +4529,7 @@
           <a:bodyPr wrap="square" lIns="254" tIns="254" rIns="254" bIns="254" rtlCol="0" anchor="ctr"/>
           <a:lstStyle/>
           <a:p>
-            <a:pPr indent="0" marL="0">
+            <a:pPr marL="0" indent="0">
               <a:buNone/>
             </a:pPr>
             <a:r>
@@ -4540,7 +4546,7 @@
             <a:endParaRPr lang="en-US" sz="1500" dirty="0"/>
           </a:p>
           <a:p>
-            <a:pPr indent="0" marL="0">
+            <a:pPr marL="0" indent="0">
               <a:buNone/>
             </a:pPr>
             <a:r>
@@ -4557,7 +4563,7 @@
             <a:endParaRPr lang="en-US" sz="1500" dirty="0"/>
           </a:p>
           <a:p>
-            <a:pPr indent="0" marL="0">
+            <a:pPr marL="0" indent="0">
               <a:buNone/>
             </a:pPr>
             <a:r>
@@ -4574,7 +4580,7 @@
             <a:endParaRPr lang="en-US" sz="1500" dirty="0"/>
           </a:p>
           <a:p>
-            <a:pPr indent="0" marL="0">
+            <a:pPr marL="0" indent="0">
               <a:buNone/>
             </a:pPr>
             <a:r>
@@ -4613,11 +4619,11 @@
           <a:bodyPr wrap="square" lIns="0" tIns="0" rIns="0" bIns="0" rtlCol="0" anchor="ctr"/>
           <a:lstStyle/>
           <a:p>
-            <a:pPr indent="0" marL="0">
-              <a:buNone/>
-            </a:pPr>
-            <a:r>
-              <a:rPr lang="en-US" sz="1400" dirty="0">
+            <a:pPr marL="0" indent="0">
+              <a:buNone/>
+            </a:pPr>
+            <a:r>
+              <a:rPr lang="en-US" sz="1200">
                 <a:solidFill>
                   <a:srgbClr val="42C6D8"/>
                 </a:solidFill>
@@ -4625,9 +4631,89 @@
                 <a:ea typeface="Cascadia Mono" pitchFamily="34" charset="-122"/>
                 <a:cs typeface="Cascadia Mono" pitchFamily="34" charset="-120"/>
               </a:rPr>
-              <a:t>ORDER BY nom COLLATE tri_francais;</a:t>
-            </a:r>
-            <a:endParaRPr lang="en-US" sz="1400" dirty="0"/>
+              <a:t>SORTIE</a:t>
+            </a:r>
+          </a:p>
+          <a:p>
+            <a:pPr marL="0" indent="0">
+              <a:buNone/>
+            </a:pPr>
+            <a:r>
+              <a:rPr lang="en-US" sz="1200">
+                <a:solidFill>
+                  <a:srgbClr val="42C6D8"/>
+                </a:solidFill>
+                <a:latin typeface="Cascadia Mono" pitchFamily="34" charset="0"/>
+                <a:ea typeface="Cascadia Mono" pitchFamily="34" charset="-122"/>
+                <a:cs typeface="Cascadia Mono" pitchFamily="34" charset="-120"/>
+              </a:rPr>
+              <a:t>Béranger  Léo</a:t>
+            </a:r>
+          </a:p>
+          <a:p>
+            <a:pPr marL="0" indent="0">
+              <a:buNone/>
+            </a:pPr>
+            <a:r>
+              <a:rPr lang="en-US" sz="1200">
+                <a:solidFill>
+                  <a:srgbClr val="42C6D8"/>
+                </a:solidFill>
+                <a:latin typeface="Cascadia Mono" pitchFamily="34" charset="0"/>
+                <a:ea typeface="Cascadia Mono" pitchFamily="34" charset="-122"/>
+                <a:cs typeface="Cascadia Mono" pitchFamily="34" charset="-120"/>
+              </a:rPr>
+              <a:t>Çağlar    Émile</a:t>
+            </a:r>
+          </a:p>
+          <a:p>
+            <a:pPr marL="0" indent="0">
+              <a:buNone/>
+            </a:pPr>
+            <a:r>
+              <a:rPr lang="en-US" sz="1200">
+                <a:solidFill>
+                  <a:srgbClr val="42C6D8"/>
+                </a:solidFill>
+                <a:latin typeface="Cascadia Mono" pitchFamily="34" charset="0"/>
+                <a:ea typeface="Cascadia Mono" pitchFamily="34" charset="-122"/>
+                <a:cs typeface="Cascadia Mono" pitchFamily="34" charset="-120"/>
+              </a:rPr>
+              <a:t>Durand    Zoé</a:t>
+            </a:r>
+          </a:p>
+          <a:p>
+            <a:pPr marL="0" indent="0">
+              <a:buNone/>
+            </a:pPr>
+            <a:r>
+              <a:rPr lang="en-US" sz="1200">
+                <a:solidFill>
+                  <a:srgbClr val="42C6D8"/>
+                </a:solidFill>
+                <a:latin typeface="Cascadia Mono" pitchFamily="34" charset="0"/>
+                <a:ea typeface="Cascadia Mono" pitchFamily="34" charset="-122"/>
+                <a:cs typeface="Cascadia Mono" pitchFamily="34" charset="-120"/>
+              </a:rPr>
+              <a:t>Évrard    Chloé</a:t>
+            </a:r>
+          </a:p>
+          <a:p>
+            <a:pPr marL="0" indent="0">
+              <a:buNone/>
+            </a:pPr>
+            <a:r>
+              <a:rPr lang="en-US" sz="1200">
+                <a:solidFill>
+                  <a:srgbClr val="42C6D8"/>
+                </a:solidFill>
+                <a:latin typeface="Cascadia Mono" pitchFamily="34" charset="0"/>
+                <a:ea typeface="Cascadia Mono" pitchFamily="34" charset="-122"/>
+                <a:cs typeface="Cascadia Mono" pitchFamily="34" charset="-120"/>
+              </a:rPr>
+              <a:t>Noël      Anaïs</a:t>
+            </a:r>
+            <a:endParaRPr lang="en-US" sz="1200" dirty="0"/>
           </a:p>
         </p:txBody>
       </p:sp>
@@ -4652,16 +4738,16 @@
           <a:bodyPr wrap="square" lIns="0" tIns="0" rIns="0" bIns="0" rtlCol="0" anchor="ctr"/>
           <a:lstStyle/>
           <a:p>
-            <a:pPr indent="0" marL="0">
-              <a:buNone/>
-            </a:pPr>
-            <a:r>
-              <a:rPr lang="en-US" sz="1150" dirty="0">
+            <a:pPr marL="0" indent="0">
+              <a:buNone/>
+            </a:pPr>
+            <a:r>
+              <a:rPr lang="fr-FR" sz="1150">
                 <a:solidFill>
                   <a:srgbClr val="A9B8C9"/>
                 </a:solidFill>
               </a:rPr>
-              <a:t>7 étudiants · 6 avec caractères non ASCII</a:t>
+              <a:t>5 lignes retournées</a:t>
             </a:r>
             <a:endParaRPr lang="en-US" sz="1150" dirty="0"/>
           </a:p>
@@ -4683,6 +4769,7 @@
         <a:solidFill>
           <a:srgbClr val="101B2D"/>
         </a:solidFill>
+        <a:effectLst/>
       </p:bgPr>
     </p:bg>
     <p:spTree>
@@ -4723,6 +4810,13 @@
             <a:prstDash val="solid"/>
           </a:ln>
         </p:spPr>
+        <p:txBody>
+          <a:bodyPr/>
+          <a:lstStyle/>
+          <a:p>
+            <a:endParaRPr lang="fr-FR"/>
+          </a:p>
+        </p:txBody>
       </p:sp>
       <p:sp>
         <p:nvSpPr>
@@ -4745,16 +4839,16 @@
           <a:bodyPr wrap="square" lIns="0" tIns="0" rIns="0" bIns="0" rtlCol="0" anchor="ctr"/>
           <a:lstStyle/>
           <a:p>
-            <a:pPr indent="0" marL="0">
-              <a:buNone/>
-            </a:pPr>
-            <a:r>
-              <a:rPr lang="en-US" sz="1000" b="1" spc="200" kern="0" dirty="0">
+            <a:pPr marL="0" indent="0">
+              <a:buNone/>
+            </a:pPr>
+            <a:r>
+              <a:rPr lang="en-US" sz="1000" b="1" kern="0" spc="200">
                 <a:solidFill>
                   <a:srgbClr val="42C6D8"/>
                 </a:solidFill>
               </a:rPr>
-              <a:t>SÉCURITÉ</a:t>
+              <a:t>EXERCICES 2–3 · SÉCURITÉ</a:t>
             </a:r>
             <a:endParaRPr lang="en-US" sz="1000" dirty="0"/>
           </a:p>
@@ -4781,7 +4875,7 @@
           <a:bodyPr wrap="square" lIns="0" tIns="0" rIns="0" bIns="0" rtlCol="0" anchor="ctr"/>
           <a:lstStyle/>
           <a:p>
-            <a:pPr indent="0" marL="0">
+            <a:pPr marL="0" indent="0">
               <a:buNone/>
             </a:pPr>
             <a:r>
@@ -4817,16 +4911,16 @@
           <a:bodyPr wrap="square" lIns="0" tIns="0" rIns="0" bIns="0" rtlCol="0" anchor="ctr"/>
           <a:lstStyle/>
           <a:p>
-            <a:pPr indent="0" marL="0">
-              <a:buNone/>
-            </a:pPr>
-            <a:r>
-              <a:rPr lang="en-US" sz="1300" dirty="0">
+            <a:pPr marL="0" indent="0">
+              <a:buNone/>
+            </a:pPr>
+            <a:r>
+              <a:rPr lang="fr-FR" sz="1300">
                 <a:solidFill>
                   <a:srgbClr val="A9B8C9"/>
                 </a:solidFill>
               </a:rPr>
-              <a:t>Les permissions sont contrôlées par des requêtes has_*_privilege.</a:t>
+              <a:t>Résultat obtenu : readonly_user peut lire notes, sans pouvoir modifier les données.</a:t>
             </a:r>
             <a:endParaRPr lang="en-US" sz="1300" dirty="0"/>
           </a:p>
@@ -4853,7 +4947,7 @@
           <a:bodyPr wrap="square" lIns="0" tIns="0" rIns="0" bIns="0" rtlCol="0" anchor="ctr"/>
           <a:lstStyle/>
           <a:p>
-            <a:pPr algn="r" indent="0" marL="0">
+            <a:pPr marL="0" indent="0" algn="r">
               <a:buNone/>
             </a:pPr>
             <a:r>
@@ -4890,6 +4984,13 @@
             <a:prstDash val="solid"/>
           </a:ln>
         </p:spPr>
+        <p:txBody>
+          <a:bodyPr/>
+          <a:lstStyle/>
+          <a:p>
+            <a:endParaRPr lang="fr-FR"/>
+          </a:p>
+        </p:txBody>
       </p:sp>
       <p:sp>
         <p:nvSpPr>
@@ -4912,16 +5013,16 @@
           <a:bodyPr wrap="square" lIns="0" tIns="0" rIns="0" bIns="0" rtlCol="0" anchor="ctr"/>
           <a:lstStyle/>
           <a:p>
-            <a:pPr indent="0" marL="0">
-              <a:buNone/>
-            </a:pPr>
-            <a:r>
-              <a:rPr lang="en-US" sz="1100" b="1" dirty="0">
+            <a:pPr marL="0" indent="0">
+              <a:buNone/>
+            </a:pPr>
+            <a:r>
+              <a:rPr lang="en-US" sz="1100" b="1">
                 <a:solidFill>
                   <a:srgbClr val="A9B8C9"/>
                 </a:solidFill>
               </a:rPr>
-              <a:t>CAPACITÉ</a:t>
+              <a:t>DROIT TESTÉ</a:t>
             </a:r>
             <a:endParaRPr lang="en-US" sz="1100" dirty="0"/>
           </a:p>
@@ -4948,11 +5049,11 @@
           <a:bodyPr wrap="square" lIns="0" tIns="0" rIns="0" bIns="0" rtlCol="0" anchor="ctr"/>
           <a:lstStyle/>
           <a:p>
-            <a:pPr algn="ctr" indent="0" marL="0">
-              <a:buNone/>
-            </a:pPr>
-            <a:r>
-              <a:rPr lang="en-US" sz="1100" b="1" dirty="0">
+            <a:pPr marL="0" indent="0" algn="ctr">
+              <a:buNone/>
+            </a:pPr>
+            <a:r>
+              <a:rPr lang="en-US" sz="1100" b="1">
                 <a:solidFill>
                   <a:srgbClr val="F0B35B"/>
                 </a:solidFill>
@@ -4984,11 +5085,11 @@
           <a:bodyPr wrap="square" lIns="0" tIns="0" rIns="0" bIns="0" rtlCol="0" anchor="ctr"/>
           <a:lstStyle/>
           <a:p>
-            <a:pPr algn="ctr" indent="0" marL="0">
-              <a:buNone/>
-            </a:pPr>
-            <a:r>
-              <a:rPr lang="en-US" sz="1100" b="1" dirty="0">
+            <a:pPr marL="0" indent="0" algn="ctr">
+              <a:buNone/>
+            </a:pPr>
+            <a:r>
+              <a:rPr lang="en-US" sz="1100" b="1">
                 <a:solidFill>
                   <a:srgbClr val="42C6D8"/>
                 </a:solidFill>
@@ -5021,6 +5122,13 @@
             <a:prstDash val="solid"/>
           </a:ln>
         </p:spPr>
+        <p:txBody>
+          <a:bodyPr/>
+          <a:lstStyle/>
+          <a:p>
+            <a:endParaRPr lang="fr-FR"/>
+          </a:p>
+        </p:txBody>
       </p:sp>
       <p:sp>
         <p:nvSpPr>
@@ -5043,7 +5151,7 @@
           <a:bodyPr wrap="square" lIns="0" tIns="0" rIns="0" bIns="0" rtlCol="0" anchor="ctr"/>
           <a:lstStyle/>
           <a:p>
-            <a:pPr indent="0" marL="0">
+            <a:pPr marL="0" indent="0">
               <a:buNone/>
             </a:pPr>
             <a:r>
@@ -5079,7 +5187,7 @@
           <a:bodyPr wrap="square" lIns="0" tIns="0" rIns="0" bIns="0" rtlCol="0" anchor="ctr"/>
           <a:lstStyle/>
           <a:p>
-            <a:pPr algn="ctr" indent="0" marL="0">
+            <a:pPr marL="0" indent="0" algn="ctr">
               <a:buNone/>
             </a:pPr>
             <a:r>
@@ -5115,7 +5223,7 @@
           <a:bodyPr wrap="square" lIns="0" tIns="0" rIns="0" bIns="0" rtlCol="0" anchor="ctr"/>
           <a:lstStyle/>
           <a:p>
-            <a:pPr algn="ctr" indent="0" marL="0">
+            <a:pPr marL="0" indent="0" algn="ctr">
               <a:buNone/>
             </a:pPr>
             <a:r>
@@ -5152,6 +5260,13 @@
             <a:prstDash val="solid"/>
           </a:ln>
         </p:spPr>
+        <p:txBody>
+          <a:bodyPr/>
+          <a:lstStyle/>
+          <a:p>
+            <a:endParaRPr lang="fr-FR"/>
+          </a:p>
+        </p:txBody>
       </p:sp>
       <p:sp>
         <p:nvSpPr>
@@ -5174,7 +5289,7 @@
           <a:bodyPr wrap="square" lIns="0" tIns="0" rIns="0" bIns="0" rtlCol="0" anchor="ctr"/>
           <a:lstStyle/>
           <a:p>
-            <a:pPr indent="0" marL="0">
+            <a:pPr marL="0" indent="0">
               <a:buNone/>
             </a:pPr>
             <a:r>
@@ -5210,7 +5325,7 @@
           <a:bodyPr wrap="square" lIns="0" tIns="0" rIns="0" bIns="0" rtlCol="0" anchor="ctr"/>
           <a:lstStyle/>
           <a:p>
-            <a:pPr algn="ctr" indent="0" marL="0">
+            <a:pPr marL="0" indent="0" algn="ctr">
               <a:buNone/>
             </a:pPr>
             <a:r>
@@ -5246,7 +5361,7 @@
           <a:bodyPr wrap="square" lIns="0" tIns="0" rIns="0" bIns="0" rtlCol="0" anchor="ctr"/>
           <a:lstStyle/>
           <a:p>
-            <a:pPr algn="ctr" indent="0" marL="0">
+            <a:pPr marL="0" indent="0" algn="ctr">
               <a:buNone/>
             </a:pPr>
             <a:r>
@@ -5283,6 +5398,13 @@
             <a:prstDash val="solid"/>
           </a:ln>
         </p:spPr>
+        <p:txBody>
+          <a:bodyPr/>
+          <a:lstStyle/>
+          <a:p>
+            <a:endParaRPr lang="fr-FR"/>
+          </a:p>
+        </p:txBody>
       </p:sp>
       <p:sp>
         <p:nvSpPr>
@@ -5305,7 +5427,7 @@
           <a:bodyPr wrap="square" lIns="0" tIns="0" rIns="0" bIns="0" rtlCol="0" anchor="ctr"/>
           <a:lstStyle/>
           <a:p>
-            <a:pPr indent="0" marL="0">
+            <a:pPr marL="0" indent="0">
               <a:buNone/>
             </a:pPr>
             <a:r>
@@ -5341,7 +5463,7 @@
           <a:bodyPr wrap="square" lIns="0" tIns="0" rIns="0" bIns="0" rtlCol="0" anchor="ctr"/>
           <a:lstStyle/>
           <a:p>
-            <a:pPr algn="ctr" indent="0" marL="0">
+            <a:pPr marL="0" indent="0" algn="ctr">
               <a:buNone/>
             </a:pPr>
             <a:r>
@@ -5377,7 +5499,7 @@
           <a:bodyPr wrap="square" lIns="0" tIns="0" rIns="0" bIns="0" rtlCol="0" anchor="ctr"/>
           <a:lstStyle/>
           <a:p>
-            <a:pPr algn="ctr" indent="0" marL="0">
+            <a:pPr marL="0" indent="0" algn="ctr">
               <a:buNone/>
             </a:pPr>
             <a:r>
@@ -5414,6 +5536,13 @@
             <a:prstDash val="solid"/>
           </a:ln>
         </p:spPr>
+        <p:txBody>
+          <a:bodyPr/>
+          <a:lstStyle/>
+          <a:p>
+            <a:endParaRPr lang="fr-FR"/>
+          </a:p>
+        </p:txBody>
       </p:sp>
       <p:sp>
         <p:nvSpPr>
@@ -5436,7 +5565,7 @@
           <a:bodyPr wrap="square" lIns="0" tIns="0" rIns="0" bIns="0" rtlCol="0" anchor="ctr"/>
           <a:lstStyle/>
           <a:p>
-            <a:pPr indent="0" marL="0">
+            <a:pPr marL="0" indent="0">
               <a:buNone/>
             </a:pPr>
             <a:r>
@@ -5472,7 +5601,7 @@
           <a:bodyPr wrap="square" lIns="0" tIns="0" rIns="0" bIns="0" rtlCol="0" anchor="ctr"/>
           <a:lstStyle/>
           <a:p>
-            <a:pPr algn="ctr" indent="0" marL="0">
+            <a:pPr marL="0" indent="0" algn="ctr">
               <a:buNone/>
             </a:pPr>
             <a:r>
@@ -5508,7 +5637,7 @@
           <a:bodyPr wrap="square" lIns="0" tIns="0" rIns="0" bIns="0" rtlCol="0" anchor="ctr"/>
           <a:lstStyle/>
           <a:p>
-            <a:pPr algn="ctr" indent="0" marL="0">
+            <a:pPr marL="0" indent="0" algn="ctr">
               <a:buNone/>
             </a:pPr>
             <a:r>
@@ -5544,18 +5673,18 @@
           <a:bodyPr wrap="square" lIns="0" tIns="0" rIns="0" bIns="0" rtlCol="0" anchor="ctr"/>
           <a:lstStyle/>
           <a:p>
-            <a:pPr algn="ctr" indent="0" marL="0">
-              <a:buNone/>
-            </a:pPr>
-            <a:r>
-              <a:rPr lang="en-US" sz="1900" b="1" dirty="0">
+            <a:pPr marL="0" indent="0" algn="ctr">
+              <a:buNone/>
+            </a:pPr>
+            <a:r>
+              <a:rPr lang="fr-FR" sz="1200" b="1">
                 <a:solidFill>
                   <a:srgbClr val="42C6D8"/>
                 </a:solidFill>
               </a:rPr>
-              <a:t>readonly_user = lecture seule sur notes</a:t>
-            </a:r>
-            <a:endParaRPr lang="en-US" sz="1900" dirty="0"/>
+              <a:t>Sortie : SELECT notes = true · INSERT notes = false · SELECT etudiants = false</a:t>
+            </a:r>
+            <a:endParaRPr lang="en-US" sz="1200" dirty="0"/>
           </a:p>
         </p:txBody>
       </p:sp>
@@ -5575,6 +5704,7 @@
         <a:solidFill>
           <a:srgbClr val="101B2D"/>
         </a:solidFill>
+        <a:effectLst/>
       </p:bgPr>
     </p:bg>
     <p:spTree>
@@ -5615,6 +5745,13 @@
             <a:prstDash val="solid"/>
           </a:ln>
         </p:spPr>
+        <p:txBody>
+          <a:bodyPr/>
+          <a:lstStyle/>
+          <a:p>
+            <a:endParaRPr lang="fr-FR"/>
+          </a:p>
+        </p:txBody>
       </p:sp>
       <p:sp>
         <p:nvSpPr>
@@ -5637,16 +5774,16 @@
           <a:bodyPr wrap="square" lIns="0" tIns="0" rIns="0" bIns="0" rtlCol="0" anchor="ctr"/>
           <a:lstStyle/>
           <a:p>
-            <a:pPr indent="0" marL="0">
-              <a:buNone/>
-            </a:pPr>
-            <a:r>
-              <a:rPr lang="en-US" sz="1000" b="1" spc="200" kern="0" dirty="0">
+            <a:pPr marL="0" indent="0">
+              <a:buNone/>
+            </a:pPr>
+            <a:r>
+              <a:rPr lang="en-US" sz="1000" b="1" kern="0" spc="200">
                 <a:solidFill>
                   <a:srgbClr val="42C6D8"/>
                 </a:solidFill>
               </a:rPr>
-              <a:t>SAUVEGARDE</a:t>
+              <a:t>EXERCICE 4 · SAUVEGARDE</a:t>
             </a:r>
             <a:endParaRPr lang="en-US" sz="1000" dirty="0"/>
           </a:p>
@@ -5673,16 +5810,16 @@
           <a:bodyPr wrap="square" lIns="0" tIns="0" rIns="0" bIns="0" rtlCol="0" anchor="ctr"/>
           <a:lstStyle/>
           <a:p>
-            <a:pPr indent="0" marL="0">
-              <a:buNone/>
-            </a:pPr>
-            <a:r>
-              <a:rPr lang="en-US" sz="2800" b="1" dirty="0">
+            <a:pPr marL="0" indent="0">
+              <a:buNone/>
+            </a:pPr>
+            <a:r>
+              <a:rPr lang="fr-FR" sz="2800" b="1">
                 <a:solidFill>
                   <a:srgbClr val="F6F8FB"/>
                 </a:solidFill>
               </a:rPr>
-              <a:t>Deux formats couvrent la portabilité et la restauration ciblée.</a:t>
+              <a:t>Le fichier SQL permet de sauvegarder puis restaurer toute la base.</a:t>
             </a:r>
             <a:endParaRPr lang="en-US" sz="2800" dirty="0"/>
           </a:p>
@@ -5709,16 +5846,16 @@
           <a:bodyPr wrap="square" lIns="0" tIns="0" rIns="0" bIns="0" rtlCol="0" anchor="ctr"/>
           <a:lstStyle/>
           <a:p>
-            <a:pPr indent="0" marL="0">
-              <a:buNone/>
-            </a:pPr>
-            <a:r>
-              <a:rPr lang="en-US" sz="1300" dirty="0">
+            <a:pPr marL="0" indent="0">
+              <a:buNone/>
+            </a:pPr>
+            <a:r>
+              <a:rPr lang="fr-FR" sz="1300">
                 <a:solidFill>
                   <a:srgbClr val="A9B8C9"/>
                 </a:solidFill>
               </a:rPr>
-              <a:t>Les options --no-owner --no-acl évitent les dépendances aux rôles du serveur source.</a:t>
+              <a:t>La sauvegarde est restaurée dans la nouvelle base BUT3_backup.</a:t>
             </a:r>
             <a:endParaRPr lang="en-US" sz="1300" dirty="0"/>
           </a:p>
@@ -5745,7 +5882,7 @@
           <a:bodyPr wrap="square" lIns="0" tIns="0" rIns="0" bIns="0" rtlCol="0" anchor="ctr"/>
           <a:lstStyle/>
           <a:p>
-            <a:pPr algn="r" indent="0" marL="0">
+            <a:pPr marL="0" indent="0" algn="r">
               <a:buNone/>
             </a:pPr>
             <a:r>
@@ -5782,6 +5919,13 @@
             <a:prstDash val="solid"/>
           </a:ln>
         </p:spPr>
+        <p:txBody>
+          <a:bodyPr/>
+          <a:lstStyle/>
+          <a:p>
+            <a:endParaRPr lang="fr-FR"/>
+          </a:p>
+        </p:txBody>
       </p:sp>
       <p:sp>
         <p:nvSpPr>
@@ -5809,6 +5953,13 @@
             <a:prstDash val="solid"/>
           </a:ln>
         </p:spPr>
+        <p:txBody>
+          <a:bodyPr/>
+          <a:lstStyle/>
+          <a:p>
+            <a:endParaRPr lang="fr-FR"/>
+          </a:p>
+        </p:txBody>
       </p:sp>
       <p:sp>
         <p:nvSpPr>
@@ -5834,6 +5985,13 @@
             <a:prstDash val="solid"/>
           </a:ln>
         </p:spPr>
+        <p:txBody>
+          <a:bodyPr/>
+          <a:lstStyle/>
+          <a:p>
+            <a:endParaRPr lang="fr-FR"/>
+          </a:p>
+        </p:txBody>
       </p:sp>
       <p:sp>
         <p:nvSpPr>
@@ -5856,7 +6014,7 @@
           <a:bodyPr wrap="square" lIns="0" tIns="0" rIns="0" bIns="0" rtlCol="0" anchor="ctr"/>
           <a:lstStyle/>
           <a:p>
-            <a:pPr indent="0" marL="0">
+            <a:pPr marL="0" indent="0">
               <a:buNone/>
             </a:pPr>
             <a:r>
@@ -5893,45 +6051,42 @@
           <a:lstStyle/>
           <a:p>
             <a:r>
-              <a:rPr lang="en-US" sz="1150" dirty="0">
+              <a:rPr lang="fr-FR" sz="1150">
                 <a:solidFill>
                   <a:srgbClr val="A9B8C9"/>
                 </a:solidFill>
               </a:rPr>
               <a:t>Base source</a:t>
             </a:r>
-            <a:endParaRPr lang="en-US" sz="1150" dirty="0"/>
-          </a:p>
-          <a:p>
-            <a:r>
-              <a:rPr lang="en-US" sz="1150" dirty="0">
+          </a:p>
+          <a:p>
+            <a:r>
+              <a:rPr lang="fr-FR" sz="1150">
                 <a:solidFill>
                   <a:srgbClr val="A9B8C9"/>
                 </a:solidFill>
               </a:rPr>
-              <a:t>7 étudiants</a:t>
-            </a:r>
-            <a:endParaRPr lang="en-US" sz="1150" dirty="0"/>
-          </a:p>
-          <a:p>
-            <a:r>
-              <a:rPr lang="en-US" sz="1150" dirty="0">
+              <a:t>5 étudiants</a:t>
+            </a:r>
+          </a:p>
+          <a:p>
+            <a:r>
+              <a:rPr lang="fr-FR" sz="1150">
                 <a:solidFill>
                   <a:srgbClr val="A9B8C9"/>
                 </a:solidFill>
               </a:rPr>
               <a:t>4 matières</a:t>
             </a:r>
-            <a:endParaRPr lang="en-US" sz="1150" dirty="0"/>
-          </a:p>
-          <a:p>
-            <a:r>
-              <a:rPr lang="en-US" sz="1150" dirty="0">
+          </a:p>
+          <a:p>
+            <a:r>
+              <a:rPr lang="fr-FR" sz="1150">
                 <a:solidFill>
                   <a:srgbClr val="A9B8C9"/>
                 </a:solidFill>
               </a:rPr>
-              <a:t>8 notes</a:t>
+              <a:t>6 notes</a:t>
             </a:r>
             <a:endParaRPr lang="en-US" sz="1150" dirty="0"/>
           </a:p>
@@ -5961,6 +6116,13 @@
             <a:prstDash val="solid"/>
           </a:ln>
         </p:spPr>
+        <p:txBody>
+          <a:bodyPr/>
+          <a:lstStyle/>
+          <a:p>
+            <a:endParaRPr lang="fr-FR"/>
+          </a:p>
+        </p:txBody>
       </p:sp>
       <p:sp>
         <p:nvSpPr>
@@ -5986,6 +6148,13 @@
             <a:prstDash val="solid"/>
           </a:ln>
         </p:spPr>
+        <p:txBody>
+          <a:bodyPr/>
+          <a:lstStyle/>
+          <a:p>
+            <a:endParaRPr lang="fr-FR"/>
+          </a:p>
+        </p:txBody>
       </p:sp>
       <p:sp>
         <p:nvSpPr>
@@ -6013,6 +6182,13 @@
             <a:prstDash val="solid"/>
           </a:ln>
         </p:spPr>
+        <p:txBody>
+          <a:bodyPr/>
+          <a:lstStyle/>
+          <a:p>
+            <a:endParaRPr lang="fr-FR"/>
+          </a:p>
+        </p:txBody>
       </p:sp>
       <p:sp>
         <p:nvSpPr>
@@ -6038,6 +6214,13 @@
             <a:prstDash val="solid"/>
           </a:ln>
         </p:spPr>
+        <p:txBody>
+          <a:bodyPr/>
+          <a:lstStyle/>
+          <a:p>
+            <a:endParaRPr lang="fr-FR"/>
+          </a:p>
+        </p:txBody>
       </p:sp>
       <p:sp>
         <p:nvSpPr>
@@ -6060,11 +6243,11 @@
           <a:bodyPr wrap="square" lIns="0" tIns="0" rIns="0" bIns="0" rtlCol="0" anchor="ctr"/>
           <a:lstStyle/>
           <a:p>
-            <a:pPr indent="0" marL="0">
-              <a:buNone/>
-            </a:pPr>
-            <a:r>
-              <a:rPr lang="en-US" sz="1600" b="1" dirty="0">
+            <a:pPr marL="0" indent="0">
+              <a:buNone/>
+            </a:pPr>
+            <a:r>
+              <a:rPr lang="en-US" sz="1600" b="1">
                 <a:solidFill>
                   <a:srgbClr val="F6F8FB"/>
                 </a:solidFill>
@@ -6097,23 +6280,22 @@
           <a:lstStyle/>
           <a:p>
             <a:r>
-              <a:rPr lang="en-US" sz="1150" dirty="0">
+              <a:rPr lang="fr-FR" sz="1150">
                 <a:solidFill>
                   <a:srgbClr val="A9B8C9"/>
                 </a:solidFill>
               </a:rPr>
-              <a:t>Dump logique lisible</a:t>
-            </a:r>
-            <a:endParaRPr lang="en-US" sz="1150" dirty="0"/>
-          </a:p>
-          <a:p>
-            <a:r>
-              <a:rPr lang="en-US" sz="1150" dirty="0">
+              <a:t>Sauvegarde avec pg_dump</a:t>
+            </a:r>
+          </a:p>
+          <a:p>
+            <a:r>
+              <a:rPr lang="fr-FR" sz="1150">
                 <a:solidFill>
                   <a:srgbClr val="A9B8C9"/>
                 </a:solidFill>
               </a:rPr>
-              <a:t>Restauration avec psql</a:t>
+              <a:t>Fichier SQL complet</a:t>
             </a:r>
             <a:endParaRPr lang="en-US" sz="1150" dirty="0"/>
           </a:p>
@@ -6145,6 +6327,13 @@
             <a:prstDash val="solid"/>
           </a:ln>
         </p:spPr>
+        <p:txBody>
+          <a:bodyPr/>
+          <a:lstStyle/>
+          <a:p>
+            <a:endParaRPr lang="fr-FR"/>
+          </a:p>
+        </p:txBody>
       </p:sp>
       <p:sp>
         <p:nvSpPr>
@@ -6170,6 +6359,13 @@
             <a:prstDash val="solid"/>
           </a:ln>
         </p:spPr>
+        <p:txBody>
+          <a:bodyPr/>
+          <a:lstStyle/>
+          <a:p>
+            <a:endParaRPr lang="fr-FR"/>
+          </a:p>
+        </p:txBody>
       </p:sp>
       <p:sp>
         <p:nvSpPr>
@@ -6192,16 +6388,16 @@
           <a:bodyPr wrap="square" lIns="0" tIns="0" rIns="0" bIns="0" rtlCol="0" anchor="ctr"/>
           <a:lstStyle/>
           <a:p>
-            <a:pPr indent="0" marL="0">
-              <a:buNone/>
-            </a:pPr>
-            <a:r>
-              <a:rPr lang="en-US" sz="1600" b="1" dirty="0">
+            <a:pPr marL="0" indent="0">
+              <a:buNone/>
+            </a:pPr>
+            <a:r>
+              <a:rPr lang="en-US" sz="1600" b="1">
                 <a:solidFill>
                   <a:srgbClr val="F6F8FB"/>
                 </a:solidFill>
               </a:rPr>
-              <a:t>multi_lang.dump</a:t>
+              <a:t>Restauration SQL</a:t>
             </a:r>
             <a:endParaRPr lang="en-US" sz="1600" dirty="0"/>
           </a:p>
@@ -6229,23 +6425,22 @@
           <a:lstStyle/>
           <a:p>
             <a:r>
-              <a:rPr lang="en-US" sz="1150" dirty="0">
+              <a:rPr lang="en-US" sz="1150">
                 <a:solidFill>
                   <a:srgbClr val="A9B8C9"/>
                 </a:solidFill>
               </a:rPr>
-              <a:t>Format custom</a:t>
-            </a:r>
-            <a:endParaRPr lang="en-US" sz="1150" dirty="0"/>
-          </a:p>
-          <a:p>
-            <a:r>
-              <a:rPr lang="en-US" sz="1150" dirty="0">
+              <a:t>createdb BUT3_backup</a:t>
+            </a:r>
+          </a:p>
+          <a:p>
+            <a:r>
+              <a:rPr lang="en-US" sz="1150">
                 <a:solidFill>
                   <a:srgbClr val="A9B8C9"/>
                 </a:solidFill>
               </a:rPr>
-              <a:t>Sélection avec pg_restore</a:t>
+              <a:t>psql -d BUT3_backup</a:t>
             </a:r>
             <a:endParaRPr lang="en-US" sz="1150" dirty="0"/>
           </a:p>
@@ -6275,6 +6470,13 @@
             <a:prstDash val="solid"/>
           </a:ln>
         </p:spPr>
+        <p:txBody>
+          <a:bodyPr/>
+          <a:lstStyle/>
+          <a:p>
+            <a:endParaRPr lang="fr-FR"/>
+          </a:p>
+        </p:txBody>
       </p:sp>
       <p:sp>
         <p:nvSpPr>
@@ -6300,6 +6502,13 @@
             <a:prstDash val="solid"/>
           </a:ln>
         </p:spPr>
+        <p:txBody>
+          <a:bodyPr/>
+          <a:lstStyle/>
+          <a:p>
+            <a:endParaRPr lang="fr-FR"/>
+          </a:p>
+        </p:txBody>
       </p:sp>
       <p:sp>
         <p:nvSpPr>
@@ -6327,6 +6536,13 @@
             <a:prstDash val="solid"/>
           </a:ln>
         </p:spPr>
+        <p:txBody>
+          <a:bodyPr/>
+          <a:lstStyle/>
+          <a:p>
+            <a:endParaRPr lang="fr-FR"/>
+          </a:p>
+        </p:txBody>
       </p:sp>
       <p:sp>
         <p:nvSpPr>
@@ -6352,6 +6568,13 @@
             <a:prstDash val="solid"/>
           </a:ln>
         </p:spPr>
+        <p:txBody>
+          <a:bodyPr/>
+          <a:lstStyle/>
+          <a:p>
+            <a:endParaRPr lang="fr-FR"/>
+          </a:p>
+        </p:txBody>
       </p:sp>
       <p:sp>
         <p:nvSpPr>
@@ -6374,7 +6597,7 @@
           <a:bodyPr wrap="square" lIns="0" tIns="0" rIns="0" bIns="0" rtlCol="0" anchor="ctr"/>
           <a:lstStyle/>
           <a:p>
-            <a:pPr indent="0" marL="0">
+            <a:pPr marL="0" indent="0">
               <a:buNone/>
             </a:pPr>
             <a:r>
@@ -6411,34 +6634,66 @@
           <a:lstStyle/>
           <a:p>
             <a:r>
-              <a:rPr lang="en-US" sz="1150" dirty="0">
+              <a:rPr lang="fr-FR" sz="1150">
                 <a:solidFill>
                   <a:srgbClr val="A9B8C9"/>
                 </a:solidFill>
               </a:rPr>
-              <a:t>Nouvelle base</a:t>
-            </a:r>
-            <a:endParaRPr lang="en-US" sz="1150" dirty="0"/>
-          </a:p>
-          <a:p>
-            <a:r>
-              <a:rPr lang="en-US" sz="1150" dirty="0">
+              <a:t>Résultat obtenu</a:t>
+            </a:r>
+          </a:p>
+          <a:p>
+            <a:endParaRPr lang="fr-FR" sz="1150">
+              <a:solidFill>
+                <a:srgbClr val="A9B8C9"/>
+              </a:solidFill>
+            </a:endParaRPr>
+          </a:p>
+          <a:p>
+            <a:r>
+              <a:rPr lang="fr-FR" sz="1150">
                 <a:solidFill>
                   <a:srgbClr val="A9B8C9"/>
                 </a:solidFill>
               </a:rPr>
-              <a:t>restaurée et</a:t>
-            </a:r>
-            <a:endParaRPr lang="en-US" sz="1150" dirty="0"/>
-          </a:p>
-          <a:p>
-            <a:r>
-              <a:rPr lang="en-US" sz="1150" dirty="0">
+              <a:t>etudiants</a:t>
+            </a:r>
+          </a:p>
+          <a:p>
+            <a:r>
+              <a:rPr lang="fr-FR" sz="1150">
                 <a:solidFill>
                   <a:srgbClr val="A9B8C9"/>
                 </a:solidFill>
               </a:rPr>
-              <a:t>vérifiée</a:t>
+              <a:t>matieres</a:t>
+            </a:r>
+          </a:p>
+          <a:p>
+            <a:r>
+              <a:rPr lang="fr-FR" sz="1150">
+                <a:solidFill>
+                  <a:srgbClr val="A9B8C9"/>
+                </a:solidFill>
+              </a:rPr>
+              <a:t>notes</a:t>
+            </a:r>
+          </a:p>
+          <a:p>
+            <a:endParaRPr lang="fr-FR" sz="1150">
+              <a:solidFill>
+                <a:srgbClr val="A9B8C9"/>
+              </a:solidFill>
+            </a:endParaRPr>
+          </a:p>
+          <a:p>
+            <a:r>
+              <a:rPr lang="fr-FR" sz="1150">
+                <a:solidFill>
+                  <a:srgbClr val="A9B8C9"/>
+                </a:solidFill>
+              </a:rPr>
+              <a:t>3 tables</a:t>
             </a:r>
             <a:endParaRPr lang="en-US" sz="1150" dirty="0"/>
           </a:p>
@@ -6465,11 +6720,11 @@
           <a:bodyPr wrap="square" lIns="0" tIns="0" rIns="0" bIns="0" rtlCol="0" anchor="ctr"/>
           <a:lstStyle/>
           <a:p>
-            <a:pPr algn="ctr" indent="0" marL="0">
-              <a:buNone/>
-            </a:pPr>
-            <a:r>
-              <a:rPr lang="en-US" sz="1300" dirty="0">
+            <a:pPr marL="0" indent="0" algn="ctr">
+              <a:buNone/>
+            </a:pPr>
+            <a:r>
+              <a:rPr lang="fr-FR" sz="1200">
                 <a:solidFill>
                   <a:srgbClr val="A9B8C9"/>
                 </a:solidFill>
@@ -6477,9 +6732,9 @@
                 <a:ea typeface="Cascadia Mono" pitchFamily="34" charset="-122"/>
                 <a:cs typeface="Cascadia Mono" pitchFamily="34" charset="-120"/>
               </a:rPr>
-              <a:t>pg_dump  →  fichier  →  restauration</a:t>
-            </a:r>
-            <a:endParaRPr lang="en-US" sz="1300" dirty="0"/>
+              <a:t>Sortie dans BUT3_backup : etudiants · matieres · notes</a:t>
+            </a:r>
+            <a:endParaRPr lang="en-US" sz="1200" dirty="0"/>
           </a:p>
         </p:txBody>
       </p:sp>
@@ -6499,6 +6754,7 @@
         <a:solidFill>
           <a:srgbClr val="101B2D"/>
         </a:solidFill>
+        <a:effectLst/>
       </p:bgPr>
     </p:bg>
     <p:spTree>
@@ -6539,6 +6795,13 @@
             <a:prstDash val="solid"/>
           </a:ln>
         </p:spPr>
+        <p:txBody>
+          <a:bodyPr/>
+          <a:lstStyle/>
+          <a:p>
+            <a:endParaRPr lang="fr-FR"/>
+          </a:p>
+        </p:txBody>
       </p:sp>
       <p:sp>
         <p:nvSpPr>
@@ -6561,16 +6824,16 @@
           <a:bodyPr wrap="square" lIns="0" tIns="0" rIns="0" bIns="0" rtlCol="0" anchor="ctr"/>
           <a:lstStyle/>
           <a:p>
-            <a:pPr indent="0" marL="0">
-              <a:buNone/>
-            </a:pPr>
-            <a:r>
-              <a:rPr lang="en-US" sz="1000" b="1" spc="200" kern="0" dirty="0">
+            <a:pPr marL="0" indent="0">
+              <a:buNone/>
+            </a:pPr>
+            <a:r>
+              <a:rPr lang="en-US" sz="1000" b="1" kern="0" spc="200">
                 <a:solidFill>
                   <a:srgbClr val="42C6D8"/>
                 </a:solidFill>
               </a:rPr>
-              <a:t>RESTAURATION CIBLÉE</a:t>
+              <a:t>EXERCICE 5 · RESTAURATION CIBLÉE</a:t>
             </a:r>
             <a:endParaRPr lang="en-US" sz="1000" dirty="0"/>
           </a:p>
@@ -6597,16 +6860,16 @@
           <a:bodyPr wrap="square" lIns="0" tIns="0" rIns="0" bIns="0" rtlCol="0" anchor="ctr"/>
           <a:lstStyle/>
           <a:p>
-            <a:pPr indent="0" marL="0">
-              <a:buNone/>
-            </a:pPr>
-            <a:r>
-              <a:rPr lang="en-US" sz="2800" b="1" dirty="0">
+            <a:pPr marL="0" indent="0">
+              <a:buNone/>
+            </a:pPr>
+            <a:r>
+              <a:rPr lang="fr-FR" sz="2800" b="1">
                 <a:solidFill>
                   <a:srgbClr val="F6F8FB"/>
                 </a:solidFill>
               </a:rPr>
-              <a:t>Le dump dédié conserve la table étudiants et toutes ses dépendances utiles.</a:t>
+              <a:t>Le dump ciblé permet de restaurer uniquement la table etudiants.</a:t>
             </a:r>
             <a:endParaRPr lang="en-US" sz="2800" dirty="0"/>
           </a:p>
@@ -6633,16 +6896,16 @@
           <a:bodyPr wrap="square" lIns="0" tIns="0" rIns="0" bIns="0" rtlCol="0" anchor="ctr"/>
           <a:lstStyle/>
           <a:p>
-            <a:pPr indent="0" marL="0">
-              <a:buNone/>
-            </a:pPr>
-            <a:r>
-              <a:rPr lang="en-US" sz="1300" dirty="0">
+            <a:pPr marL="0" indent="0">
+              <a:buNone/>
+            </a:pPr>
+            <a:r>
+              <a:rPr lang="fr-FR" sz="1300">
                 <a:solidFill>
                   <a:srgbClr val="A9B8C9"/>
                 </a:solidFill>
               </a:rPr>
-              <a:t>La séquence et les contraintes sont indispensables pour continuer à insérer après restauration.</a:t>
+              <a:t>La restauration est effectuée dans une base vide.</a:t>
             </a:r>
             <a:endParaRPr lang="en-US" sz="1300" dirty="0"/>
           </a:p>
@@ -6669,7 +6932,7 @@
           <a:bodyPr wrap="square" lIns="0" tIns="0" rIns="0" bIns="0" rtlCol="0" anchor="ctr"/>
           <a:lstStyle/>
           <a:p>
-            <a:pPr algn="r" indent="0" marL="0">
+            <a:pPr marL="0" indent="0" algn="r">
               <a:buNone/>
             </a:pPr>
             <a:r>
@@ -6706,6 +6969,13 @@
             <a:prstDash val="solid"/>
           </a:ln>
         </p:spPr>
+        <p:txBody>
+          <a:bodyPr/>
+          <a:lstStyle/>
+          <a:p>
+            <a:endParaRPr lang="fr-FR"/>
+          </a:p>
+        </p:txBody>
       </p:sp>
       <p:sp>
         <p:nvSpPr>
@@ -6733,6 +7003,13 @@
             <a:prstDash val="solid"/>
           </a:ln>
         </p:spPr>
+        <p:txBody>
+          <a:bodyPr/>
+          <a:lstStyle/>
+          <a:p>
+            <a:endParaRPr lang="fr-FR"/>
+          </a:p>
+        </p:txBody>
       </p:sp>
       <p:sp>
         <p:nvSpPr>
@@ -6758,6 +7035,13 @@
             <a:prstDash val="solid"/>
           </a:ln>
         </p:spPr>
+        <p:txBody>
+          <a:bodyPr/>
+          <a:lstStyle/>
+          <a:p>
+            <a:endParaRPr lang="fr-FR"/>
+          </a:p>
+        </p:txBody>
       </p:sp>
       <p:sp>
         <p:nvSpPr>
@@ -6780,7 +7064,7 @@
           <a:bodyPr wrap="square" lIns="0" tIns="0" rIns="0" bIns="0" rtlCol="0" anchor="ctr"/>
           <a:lstStyle/>
           <a:p>
-            <a:pPr indent="0" marL="0">
+            <a:pPr marL="0" indent="0">
               <a:buNone/>
             </a:pPr>
             <a:r>
@@ -6817,34 +7101,22 @@
           <a:lstStyle/>
           <a:p>
             <a:r>
-              <a:rPr lang="en-US" sz="1150" dirty="0">
+              <a:rPr lang="fr-FR" sz="1150">
                 <a:solidFill>
                   <a:srgbClr val="A9B8C9"/>
                 </a:solidFill>
               </a:rPr>
               <a:t>pg_dump -Fc</a:t>
             </a:r>
-            <a:endParaRPr lang="en-US" sz="1150" dirty="0"/>
-          </a:p>
-          <a:p>
-            <a:r>
-              <a:rPr lang="en-US" sz="1150" dirty="0">
+          </a:p>
+          <a:p>
+            <a:r>
+              <a:rPr lang="fr-FR" sz="1150">
                 <a:solidFill>
                   <a:srgbClr val="A9B8C9"/>
                 </a:solidFill>
               </a:rPr>
               <a:t>-t etudiants</a:t>
-            </a:r>
-            <a:endParaRPr lang="en-US" sz="1150" dirty="0"/>
-          </a:p>
-          <a:p>
-            <a:r>
-              <a:rPr lang="en-US" sz="1150" dirty="0">
-                <a:solidFill>
-                  <a:srgbClr val="A9B8C9"/>
-                </a:solidFill>
-              </a:rPr>
-              <a:t>--no-owner --no-acl</a:t>
             </a:r>
             <a:endParaRPr lang="en-US" sz="1150" dirty="0"/>
           </a:p>
@@ -6874,6 +7146,13 @@
             <a:prstDash val="solid"/>
           </a:ln>
         </p:spPr>
+        <p:txBody>
+          <a:bodyPr/>
+          <a:lstStyle/>
+          <a:p>
+            <a:endParaRPr lang="fr-FR"/>
+          </a:p>
+        </p:txBody>
       </p:sp>
       <p:sp>
         <p:nvSpPr>
@@ -6901,6 +7180,13 @@
             <a:prstDash val="solid"/>
           </a:ln>
         </p:spPr>
+        <p:txBody>
+          <a:bodyPr/>
+          <a:lstStyle/>
+          <a:p>
+            <a:endParaRPr lang="fr-FR"/>
+          </a:p>
+        </p:txBody>
       </p:sp>
       <p:sp>
         <p:nvSpPr>
@@ -6926,6 +7212,13 @@
             <a:prstDash val="solid"/>
           </a:ln>
         </p:spPr>
+        <p:txBody>
+          <a:bodyPr/>
+          <a:lstStyle/>
+          <a:p>
+            <a:endParaRPr lang="fr-FR"/>
+          </a:p>
+        </p:txBody>
       </p:sp>
       <p:sp>
         <p:nvSpPr>
@@ -6948,16 +7241,16 @@
           <a:bodyPr wrap="square" lIns="0" tIns="0" rIns="0" bIns="0" rtlCol="0" anchor="ctr"/>
           <a:lstStyle/>
           <a:p>
-            <a:pPr indent="0" marL="0">
-              <a:buNone/>
-            </a:pPr>
-            <a:r>
-              <a:rPr lang="en-US" sz="1600" b="1" dirty="0">
+            <a:pPr marL="0" indent="0">
+              <a:buNone/>
+            </a:pPr>
+            <a:r>
+              <a:rPr lang="en-US" sz="1600" b="1">
                 <a:solidFill>
                   <a:srgbClr val="F6F8FB"/>
                 </a:solidFill>
               </a:rPr>
-              <a:t>Contenu restauré</a:t>
+              <a:t>Résultat obtenu</a:t>
             </a:r>
             <a:endParaRPr lang="en-US" sz="1600" dirty="0"/>
           </a:p>
@@ -6985,56 +7278,59 @@
           <a:lstStyle/>
           <a:p>
             <a:r>
-              <a:rPr lang="en-US" sz="1150" dirty="0">
+              <a:rPr lang="fr-FR" sz="1150">
                 <a:solidFill>
                   <a:srgbClr val="A9B8C9"/>
                 </a:solidFill>
               </a:rPr>
-              <a:t>✓ table etudiants</a:t>
-            </a:r>
-            <a:endParaRPr lang="en-US" sz="1150" dirty="0"/>
-          </a:p>
-          <a:p>
-            <a:r>
-              <a:rPr lang="en-US" sz="1150" dirty="0">
+              <a:t>tablename</a:t>
+            </a:r>
+          </a:p>
+          <a:p>
+            <a:r>
+              <a:rPr lang="fr-FR" sz="1150">
                 <a:solidFill>
                   <a:srgbClr val="A9B8C9"/>
                 </a:solidFill>
               </a:rPr>
-              <a:t>✓ 7 lignes</a:t>
-            </a:r>
-            <a:endParaRPr lang="en-US" sz="1150" dirty="0"/>
-          </a:p>
-          <a:p>
-            <a:r>
-              <a:rPr lang="en-US" sz="1150" dirty="0">
+              <a:t>────────</a:t>
+            </a:r>
+          </a:p>
+          <a:p>
+            <a:r>
+              <a:rPr lang="fr-FR" sz="1150">
                 <a:solidFill>
                   <a:srgbClr val="A9B8C9"/>
                 </a:solidFill>
               </a:rPr>
-              <a:t>✓ séquence</a:t>
-            </a:r>
-            <a:endParaRPr lang="en-US" sz="1150" dirty="0"/>
-          </a:p>
-          <a:p>
-            <a:r>
-              <a:rPr lang="en-US" sz="1150" dirty="0">
+              <a:t>etudiants</a:t>
+            </a:r>
+          </a:p>
+          <a:p>
+            <a:endParaRPr lang="fr-FR" sz="1150">
+              <a:solidFill>
+                <a:srgbClr val="A9B8C9"/>
+              </a:solidFill>
+            </a:endParaRPr>
+          </a:p>
+          <a:p>
+            <a:r>
+              <a:rPr lang="fr-FR" sz="1150">
                 <a:solidFill>
                   <a:srgbClr val="A9B8C9"/>
                 </a:solidFill>
               </a:rPr>
-              <a:t>✓ clé primaire</a:t>
-            </a:r>
-            <a:endParaRPr lang="en-US" sz="1150" dirty="0"/>
-          </a:p>
-          <a:p>
-            <a:r>
-              <a:rPr lang="en-US" sz="1150" dirty="0">
+              <a:t>nombre_etudiants</a:t>
+            </a:r>
+          </a:p>
+          <a:p>
+            <a:r>
+              <a:rPr lang="fr-FR" sz="1150">
                 <a:solidFill>
                   <a:srgbClr val="A9B8C9"/>
                 </a:solidFill>
               </a:rPr>
-              <a:t>✓ email UNIQUE</a:t>
+              <a:t>5</a:t>
             </a:r>
             <a:endParaRPr lang="en-US" sz="1150" dirty="0"/>
           </a:p>
@@ -7064,6 +7360,13 @@
             <a:prstDash val="solid"/>
           </a:ln>
         </p:spPr>
+        <p:txBody>
+          <a:bodyPr/>
+          <a:lstStyle/>
+          <a:p>
+            <a:endParaRPr lang="fr-FR"/>
+          </a:p>
+        </p:txBody>
       </p:sp>
       <p:sp>
         <p:nvSpPr>
@@ -7091,6 +7394,13 @@
             <a:prstDash val="solid"/>
           </a:ln>
         </p:spPr>
+        <p:txBody>
+          <a:bodyPr/>
+          <a:lstStyle/>
+          <a:p>
+            <a:endParaRPr lang="fr-FR"/>
+          </a:p>
+        </p:txBody>
       </p:sp>
       <p:sp>
         <p:nvSpPr>
@@ -7116,6 +7426,13 @@
             <a:prstDash val="solid"/>
           </a:ln>
         </p:spPr>
+        <p:txBody>
+          <a:bodyPr/>
+          <a:lstStyle/>
+          <a:p>
+            <a:endParaRPr lang="fr-FR"/>
+          </a:p>
+        </p:txBody>
       </p:sp>
       <p:sp>
         <p:nvSpPr>
@@ -7138,7 +7455,7 @@
           <a:bodyPr wrap="square" lIns="0" tIns="0" rIns="0" bIns="0" rtlCol="0" anchor="ctr"/>
           <a:lstStyle/>
           <a:p>
-            <a:pPr indent="0" marL="0">
+            <a:pPr marL="0" indent="0">
               <a:buNone/>
             </a:pPr>
             <a:r>
@@ -7175,37 +7492,39 @@
           <a:lstStyle/>
           <a:p>
             <a:r>
-              <a:rPr lang="en-US" sz="1150" dirty="0">
+              <a:rPr lang="fr-FR" sz="1150">
                 <a:solidFill>
                   <a:srgbClr val="A9B8C9"/>
                 </a:solidFill>
               </a:rPr>
               <a:t>BUT3_etudiants_only</a:t>
             </a:r>
-            <a:endParaRPr lang="en-US" sz="1150" dirty="0"/>
-          </a:p>
-          <a:p>
-            <a:endParaRPr lang="en-US" sz="1150" dirty="0"/>
-          </a:p>
-          <a:p>
-            <a:r>
-              <a:rPr lang="en-US" sz="1150" dirty="0">
+          </a:p>
+          <a:p>
+            <a:endParaRPr lang="fr-FR" sz="1150">
+              <a:solidFill>
+                <a:srgbClr val="A9B8C9"/>
+              </a:solidFill>
+            </a:endParaRPr>
+          </a:p>
+          <a:p>
+            <a:r>
+              <a:rPr lang="fr-FR" sz="1150">
                 <a:solidFill>
                   <a:srgbClr val="A9B8C9"/>
                 </a:solidFill>
               </a:rPr>
-              <a:t>Nouvelle insertion</a:t>
-            </a:r>
-            <a:endParaRPr lang="en-US" sz="1150" dirty="0"/>
-          </a:p>
-          <a:p>
-            <a:r>
-              <a:rPr lang="en-US" sz="1150" dirty="0">
+              <a:t>1 table présente</a:t>
+            </a:r>
+          </a:p>
+          <a:p>
+            <a:r>
+              <a:rPr lang="fr-FR" sz="1150">
                 <a:solidFill>
                   <a:srgbClr val="A9B8C9"/>
                 </a:solidFill>
               </a:rPr>
-              <a:t>→ id_etudiant = 8</a:t>
+              <a:t>5 lignes restaurées</a:t>
             </a:r>
             <a:endParaRPr lang="en-US" sz="1150" dirty="0"/>
           </a:p>
@@ -7232,16 +7551,16 @@
           <a:bodyPr wrap="square" lIns="0" tIns="0" rIns="0" bIns="0" rtlCol="0" anchor="ctr"/>
           <a:lstStyle/>
           <a:p>
-            <a:pPr algn="ctr" indent="0" marL="0">
-              <a:buNone/>
-            </a:pPr>
-            <a:r>
-              <a:rPr lang="en-US" sz="1400" b="1" dirty="0">
+            <a:pPr marL="0" indent="0" algn="ctr">
+              <a:buNone/>
+            </a:pPr>
+            <a:r>
+              <a:rPr lang="fr-FR" sz="1400" b="1">
                 <a:solidFill>
                   <a:srgbClr val="EF7B79"/>
                 </a:solidFill>
               </a:rPr>
-              <a:t>Sans la séquence, l'insertion automatique échoue.</a:t>
+              <a:t>Sortie : etudiants uniquement · 5 lignes</a:t>
             </a:r>
             <a:endParaRPr lang="en-US" sz="1400" dirty="0"/>
           </a:p>
@@ -7263,6 +7582,7 @@
         <a:solidFill>
           <a:srgbClr val="101B2D"/>
         </a:solidFill>
+        <a:effectLst/>
       </p:bgPr>
     </p:bg>
     <p:spTree>
@@ -7303,6 +7623,13 @@
             <a:prstDash val="solid"/>
           </a:ln>
         </p:spPr>
+        <p:txBody>
+          <a:bodyPr/>
+          <a:lstStyle/>
+          <a:p>
+            <a:endParaRPr lang="fr-FR"/>
+          </a:p>
+        </p:txBody>
       </p:sp>
       <p:sp>
         <p:nvSpPr>
@@ -7325,16 +7652,16 @@
           <a:bodyPr wrap="square" lIns="0" tIns="0" rIns="0" bIns="0" rtlCol="0" anchor="ctr"/>
           <a:lstStyle/>
           <a:p>
-            <a:pPr indent="0" marL="0">
-              <a:buNone/>
-            </a:pPr>
-            <a:r>
-              <a:rPr lang="en-US" sz="1000" b="1" spc="200" kern="0" dirty="0">
+            <a:pPr marL="0" indent="0">
+              <a:buNone/>
+            </a:pPr>
+            <a:r>
+              <a:rPr lang="en-US" sz="1000" b="1" kern="0" spc="200">
                 <a:solidFill>
                   <a:srgbClr val="42C6D8"/>
                 </a:solidFill>
               </a:rPr>
-              <a:t>VALIDATION</a:t>
+              <a:t>DÉMONSTRATION</a:t>
             </a:r>
             <a:endParaRPr lang="en-US" sz="1000" dirty="0"/>
           </a:p>
@@ -7361,16 +7688,16 @@
           <a:bodyPr wrap="square" lIns="0" tIns="0" rIns="0" bIns="0" rtlCol="0" anchor="ctr"/>
           <a:lstStyle/>
           <a:p>
-            <a:pPr indent="0" marL="0">
-              <a:buNone/>
-            </a:pPr>
-            <a:r>
-              <a:rPr lang="en-US" sz="2800" b="1" dirty="0">
+            <a:pPr marL="0" indent="0">
+              <a:buNone/>
+            </a:pPr>
+            <a:r>
+              <a:rPr lang="fr-FR" sz="2800" b="1">
                 <a:solidFill>
                   <a:srgbClr val="F6F8FB"/>
                 </a:solidFill>
               </a:rPr>
-              <a:t>Les cinq exercices sont exécutés et vérifiés sur PostgreSQL 17.</a:t>
+              <a:t>Les résultats concrets permettent de présenter le projet.</a:t>
             </a:r>
             <a:endParaRPr lang="en-US" sz="2800" dirty="0"/>
           </a:p>
@@ -7397,16 +7724,16 @@
           <a:bodyPr wrap="square" lIns="0" tIns="0" rIns="0" bIns="0" rtlCol="0" anchor="ctr"/>
           <a:lstStyle/>
           <a:p>
-            <a:pPr indent="0" marL="0">
-              <a:buNone/>
-            </a:pPr>
-            <a:r>
-              <a:rPr lang="en-US" sz="1300" dirty="0">
+            <a:pPr marL="0" indent="0">
+              <a:buNone/>
+            </a:pPr>
+            <a:r>
+              <a:rPr lang="fr-FR" sz="1300">
                 <a:solidFill>
                   <a:srgbClr val="A9B8C9"/>
                 </a:solidFill>
               </a:rPr>
-              <a:t>Le dépôt contient les scripts, dumps, schéma et documentation nécessaires à la démonstration.</a:t>
+              <a:t>Chaque résultat correspond directement à une demande du TP.</a:t>
             </a:r>
             <a:endParaRPr lang="en-US" sz="1300" dirty="0"/>
           </a:p>
@@ -7433,7 +7760,7 @@
           <a:bodyPr wrap="square" lIns="0" tIns="0" rIns="0" bIns="0" rtlCol="0" anchor="ctr"/>
           <a:lstStyle/>
           <a:p>
-            <a:pPr algn="r" indent="0" marL="0">
+            <a:pPr marL="0" indent="0" algn="r">
               <a:buNone/>
             </a:pPr>
             <a:r>
@@ -7470,6 +7797,13 @@
             <a:prstDash val="solid"/>
           </a:ln>
         </p:spPr>
+        <p:txBody>
+          <a:bodyPr/>
+          <a:lstStyle/>
+          <a:p>
+            <a:endParaRPr lang="fr-FR"/>
+          </a:p>
+        </p:txBody>
       </p:sp>
       <p:sp>
         <p:nvSpPr>
@@ -7493,6 +7827,13 @@
             <a:prstDash val="solid"/>
           </a:ln>
         </p:spPr>
+        <p:txBody>
+          <a:bodyPr/>
+          <a:lstStyle/>
+          <a:p>
+            <a:endParaRPr lang="fr-FR"/>
+          </a:p>
+        </p:txBody>
       </p:sp>
       <p:sp>
         <p:nvSpPr>
@@ -7515,16 +7856,16 @@
           <a:bodyPr wrap="square" lIns="0" tIns="0" rIns="0" bIns="0" rtlCol="0" anchor="ctr"/>
           <a:lstStyle/>
           <a:p>
-            <a:pPr indent="0" marL="0">
-              <a:buNone/>
-            </a:pPr>
-            <a:r>
-              <a:rPr lang="en-US" sz="1500" dirty="0">
+            <a:pPr marL="0" indent="0">
+              <a:buNone/>
+            </a:pPr>
+            <a:r>
+              <a:rPr lang="en-US" sz="1500">
                 <a:solidFill>
                   <a:srgbClr val="F6F8FB"/>
                 </a:solidFill>
               </a:rPr>
-              <a:t>UTF-8 + ICU fr-FR</a:t>
+              <a:t>Tri français</a:t>
             </a:r>
             <a:endParaRPr lang="en-US" sz="1500" dirty="0"/>
           </a:p>
@@ -7551,16 +7892,16 @@
           <a:bodyPr wrap="square" lIns="0" tIns="0" rIns="0" bIns="0" rtlCol="0" anchor="ctr"/>
           <a:lstStyle/>
           <a:p>
-            <a:pPr algn="ctr" indent="0" marL="0">
-              <a:buNone/>
-            </a:pPr>
-            <a:r>
-              <a:rPr lang="en-US" sz="1100" b="1" dirty="0">
+            <a:pPr marL="0" indent="0" algn="ctr">
+              <a:buNone/>
+            </a:pPr>
+            <a:r>
+              <a:rPr lang="en-US" sz="1100" b="1">
                 <a:solidFill>
                   <a:srgbClr val="42C6D8"/>
                 </a:solidFill>
               </a:rPr>
-              <a:t>PASS</a:t>
+              <a:t>Noms accentués classés</a:t>
             </a:r>
             <a:endParaRPr lang="en-US" sz="1100" dirty="0"/>
           </a:p>
@@ -7588,6 +7929,13 @@
             <a:prstDash val="solid"/>
           </a:ln>
         </p:spPr>
+        <p:txBody>
+          <a:bodyPr/>
+          <a:lstStyle/>
+          <a:p>
+            <a:endParaRPr lang="fr-FR"/>
+          </a:p>
+        </p:txBody>
       </p:sp>
       <p:sp>
         <p:nvSpPr>
@@ -7610,16 +7958,16 @@
           <a:bodyPr wrap="square" lIns="0" tIns="0" rIns="0" bIns="0" rtlCol="0" anchor="ctr"/>
           <a:lstStyle/>
           <a:p>
-            <a:pPr indent="0" marL="0">
-              <a:buNone/>
-            </a:pPr>
-            <a:r>
-              <a:rPr lang="en-US" sz="1500" dirty="0">
+            <a:pPr marL="0" indent="0">
+              <a:buNone/>
+            </a:pPr>
+            <a:r>
+              <a:rPr lang="en-US" sz="1500">
                 <a:solidFill>
                   <a:srgbClr val="F6F8FB"/>
                 </a:solidFill>
               </a:rPr>
-              <a:t>Schéma normalisé</a:t>
+              <a:t>Lecture seule</a:t>
             </a:r>
             <a:endParaRPr lang="en-US" sz="1500" dirty="0"/>
           </a:p>
@@ -7646,16 +7994,16 @@
           <a:bodyPr wrap="square" lIns="0" tIns="0" rIns="0" bIns="0" rtlCol="0" anchor="ctr"/>
           <a:lstStyle/>
           <a:p>
-            <a:pPr algn="ctr" indent="0" marL="0">
-              <a:buNone/>
-            </a:pPr>
-            <a:r>
-              <a:rPr lang="en-US" sz="1100" b="1" dirty="0">
+            <a:pPr marL="0" indent="0" algn="ctr">
+              <a:buNone/>
+            </a:pPr>
+            <a:r>
+              <a:rPr lang="en-US" sz="1100" b="1">
                 <a:solidFill>
                   <a:srgbClr val="73D7B0"/>
                 </a:solidFill>
               </a:rPr>
-              <a:t>PASS</a:t>
+              <a:t>SELECT notes autorisé</a:t>
             </a:r>
             <a:endParaRPr lang="en-US" sz="1100" dirty="0"/>
           </a:p>
@@ -7683,6 +8031,13 @@
             <a:prstDash val="solid"/>
           </a:ln>
         </p:spPr>
+        <p:txBody>
+          <a:bodyPr/>
+          <a:lstStyle/>
+          <a:p>
+            <a:endParaRPr lang="fr-FR"/>
+          </a:p>
+        </p:txBody>
       </p:sp>
       <p:sp>
         <p:nvSpPr>
@@ -7705,16 +8060,16 @@
           <a:bodyPr wrap="square" lIns="0" tIns="0" rIns="0" bIns="0" rtlCol="0" anchor="ctr"/>
           <a:lstStyle/>
           <a:p>
-            <a:pPr indent="0" marL="0">
-              <a:buNone/>
-            </a:pPr>
-            <a:r>
-              <a:rPr lang="en-US" sz="1500" dirty="0">
+            <a:pPr marL="0" indent="0">
+              <a:buNone/>
+            </a:pPr>
+            <a:r>
+              <a:rPr lang="en-US" sz="1500">
                 <a:solidFill>
                   <a:srgbClr val="F6F8FB"/>
                 </a:solidFill>
               </a:rPr>
-              <a:t>Privilèges minimaux</a:t>
+              <a:t>Droits limités</a:t>
             </a:r>
             <a:endParaRPr lang="en-US" sz="1500" dirty="0"/>
           </a:p>
@@ -7741,16 +8096,16 @@
           <a:bodyPr wrap="square" lIns="0" tIns="0" rIns="0" bIns="0" rtlCol="0" anchor="ctr"/>
           <a:lstStyle/>
           <a:p>
-            <a:pPr algn="ctr" indent="0" marL="0">
-              <a:buNone/>
-            </a:pPr>
-            <a:r>
-              <a:rPr lang="en-US" sz="1100" b="1" dirty="0">
+            <a:pPr marL="0" indent="0" algn="ctr">
+              <a:buNone/>
+            </a:pPr>
+            <a:r>
+              <a:rPr lang="en-US" sz="1100" b="1">
                 <a:solidFill>
                   <a:srgbClr val="F0B35B"/>
                 </a:solidFill>
               </a:rPr>
-              <a:t>PASS</a:t>
+              <a:t>INSERT notes refusé</a:t>
             </a:r>
             <a:endParaRPr lang="en-US" sz="1100" dirty="0"/>
           </a:p>
@@ -7778,6 +8133,13 @@
             <a:prstDash val="solid"/>
           </a:ln>
         </p:spPr>
+        <p:txBody>
+          <a:bodyPr/>
+          <a:lstStyle/>
+          <a:p>
+            <a:endParaRPr lang="fr-FR"/>
+          </a:p>
+        </p:txBody>
       </p:sp>
       <p:sp>
         <p:nvSpPr>
@@ -7800,11 +8162,11 @@
           <a:bodyPr wrap="square" lIns="0" tIns="0" rIns="0" bIns="0" rtlCol="0" anchor="ctr"/>
           <a:lstStyle/>
           <a:p>
-            <a:pPr indent="0" marL="0">
-              <a:buNone/>
-            </a:pPr>
-            <a:r>
-              <a:rPr lang="en-US" sz="1500" dirty="0">
+            <a:pPr marL="0" indent="0">
+              <a:buNone/>
+            </a:pPr>
+            <a:r>
+              <a:rPr lang="en-US" sz="1500">
                 <a:solidFill>
                   <a:srgbClr val="F6F8FB"/>
                 </a:solidFill>
@@ -7836,16 +8198,16 @@
           <a:bodyPr wrap="square" lIns="0" tIns="0" rIns="0" bIns="0" rtlCol="0" anchor="ctr"/>
           <a:lstStyle/>
           <a:p>
-            <a:pPr algn="ctr" indent="0" marL="0">
-              <a:buNone/>
-            </a:pPr>
-            <a:r>
-              <a:rPr lang="en-US" sz="1100" b="1" dirty="0">
+            <a:pPr marL="0" indent="0" algn="ctr">
+              <a:buNone/>
+            </a:pPr>
+            <a:r>
+              <a:rPr lang="en-US" sz="1100" b="1">
                 <a:solidFill>
                   <a:srgbClr val="EF7B79"/>
                 </a:solidFill>
               </a:rPr>
-              <a:t>PASS</a:t>
+              <a:t>BUT3_backup : 3 tables</a:t>
             </a:r>
             <a:endParaRPr lang="en-US" sz="1100" dirty="0"/>
           </a:p>
@@ -7873,6 +8235,13 @@
             <a:prstDash val="solid"/>
           </a:ln>
         </p:spPr>
+        <p:txBody>
+          <a:bodyPr/>
+          <a:lstStyle/>
+          <a:p>
+            <a:endParaRPr lang="fr-FR"/>
+          </a:p>
+        </p:txBody>
       </p:sp>
       <p:sp>
         <p:nvSpPr>
@@ -7895,11 +8264,11 @@
           <a:bodyPr wrap="square" lIns="0" tIns="0" rIns="0" bIns="0" rtlCol="0" anchor="ctr"/>
           <a:lstStyle/>
           <a:p>
-            <a:pPr indent="0" marL="0">
-              <a:buNone/>
-            </a:pPr>
-            <a:r>
-              <a:rPr lang="en-US" sz="1500" dirty="0">
+            <a:pPr marL="0" indent="0">
+              <a:buNone/>
+            </a:pPr>
+            <a:r>
+              <a:rPr lang="en-US" sz="1500">
                 <a:solidFill>
                   <a:srgbClr val="F6F8FB"/>
                 </a:solidFill>
@@ -7931,16 +8300,16 @@
           <a:bodyPr wrap="square" lIns="0" tIns="0" rIns="0" bIns="0" rtlCol="0" anchor="ctr"/>
           <a:lstStyle/>
           <a:p>
-            <a:pPr algn="ctr" indent="0" marL="0">
-              <a:buNone/>
-            </a:pPr>
-            <a:r>
-              <a:rPr lang="en-US" sz="1100" b="1" dirty="0">
+            <a:pPr marL="0" indent="0" algn="ctr">
+              <a:buNone/>
+            </a:pPr>
+            <a:r>
+              <a:rPr lang="en-US" sz="1100" b="1">
                 <a:solidFill>
                   <a:srgbClr val="42C6D8"/>
                 </a:solidFill>
               </a:rPr>
-              <a:t>PASS</a:t>
+              <a:t>Uniquement etudiants</a:t>
             </a:r>
             <a:endParaRPr lang="en-US" sz="1100" dirty="0"/>
           </a:p>
@@ -7972,6 +8341,13 @@
             <a:prstDash val="solid"/>
           </a:ln>
         </p:spPr>
+        <p:txBody>
+          <a:bodyPr/>
+          <a:lstStyle/>
+          <a:p>
+            <a:endParaRPr lang="fr-FR"/>
+          </a:p>
+        </p:txBody>
       </p:sp>
       <p:sp>
         <p:nvSpPr>
@@ -7994,16 +8370,16 @@
           <a:bodyPr wrap="square" lIns="0" tIns="0" rIns="0" bIns="0" rtlCol="0" anchor="ctr"/>
           <a:lstStyle/>
           <a:p>
-            <a:pPr algn="ctr" indent="0" marL="0">
-              <a:buNone/>
-            </a:pPr>
-            <a:r>
-              <a:rPr lang="en-US" sz="1800" b="1" dirty="0">
+            <a:pPr marL="0" indent="0" algn="ctr">
+              <a:buNone/>
+            </a:pPr>
+            <a:r>
+              <a:rPr lang="en-US" sz="1800" b="1">
                 <a:solidFill>
                   <a:srgbClr val="42C6D8"/>
                 </a:solidFill>
               </a:rPr>
-              <a:t>Conclusion</a:t>
+              <a:t>À retenir</a:t>
             </a:r>
             <a:endParaRPr lang="en-US" sz="1800" dirty="0"/>
           </a:p>
@@ -8030,16 +8406,78 @@
           <a:bodyPr wrap="square" lIns="635" tIns="635" rIns="635" bIns="635" rtlCol="0" anchor="ctr"/>
           <a:lstStyle/>
           <a:p>
-            <a:pPr algn="ctr" indent="0" marL="0">
-              <a:buNone/>
-            </a:pPr>
-            <a:r>
-              <a:rPr lang="en-US" sz="1600" b="1" dirty="0">
+            <a:pPr marL="0" indent="0" algn="ctr">
+              <a:buNone/>
+            </a:pPr>
+            <a:r>
+              <a:rPr lang="fr-FR" sz="1600" b="1">
                 <a:solidFill>
                   <a:srgbClr val="F6F8FB"/>
                 </a:solidFill>
               </a:rPr>
-              <a:t>Le projet répond aux consignes du TP et reste rejouable sur une installation PostgreSQL propre.</a:t>
+              <a:t>La base est multilingue,</a:t>
+            </a:r>
+          </a:p>
+          <a:p>
+            <a:pPr marL="0" indent="0" algn="ctr">
+              <a:buNone/>
+            </a:pPr>
+            <a:r>
+              <a:rPr lang="fr-FR" sz="1600" b="1">
+                <a:solidFill>
+                  <a:srgbClr val="F6F8FB"/>
+                </a:solidFill>
+              </a:rPr>
+              <a:t>normalisée et sécurisée.</a:t>
+            </a:r>
+          </a:p>
+          <a:p>
+            <a:pPr marL="0" indent="0" algn="ctr">
+              <a:buNone/>
+            </a:pPr>
+            <a:endParaRPr lang="fr-FR" sz="1600" b="1">
+              <a:solidFill>
+                <a:srgbClr val="F6F8FB"/>
+              </a:solidFill>
+            </a:endParaRPr>
+          </a:p>
+          <a:p>
+            <a:pPr marL="0" indent="0" algn="ctr">
+              <a:buNone/>
+            </a:pPr>
+            <a:r>
+              <a:rPr lang="fr-FR" sz="1600" b="1">
+                <a:solidFill>
+                  <a:srgbClr val="F6F8FB"/>
+                </a:solidFill>
+              </a:rPr>
+              <a:t>Les deux restaurations</a:t>
+            </a:r>
+          </a:p>
+          <a:p>
+            <a:pPr marL="0" indent="0" algn="ctr">
+              <a:buNone/>
+            </a:pPr>
+            <a:r>
+              <a:rPr lang="fr-FR" sz="1600" b="1">
+                <a:solidFill>
+                  <a:srgbClr val="F6F8FB"/>
+                </a:solidFill>
+              </a:rPr>
+              <a:t>répondent aux besoins</a:t>
+            </a:r>
+          </a:p>
+          <a:p>
+            <a:pPr marL="0" indent="0" algn="ctr">
+              <a:buNone/>
+            </a:pPr>
+            <a:r>
+              <a:rPr lang="fr-FR" sz="1600" b="1">
+                <a:solidFill>
+                  <a:srgbClr val="F6F8FB"/>
+                </a:solidFill>
+              </a:rPr>
+              <a:t>du sujet.</a:t>
             </a:r>
             <a:endParaRPr lang="en-US" sz="1600" dirty="0"/>
           </a:p>
@@ -8066,11 +8504,11 @@
           <a:bodyPr wrap="square" lIns="0" tIns="0" rIns="0" bIns="0" rtlCol="0" anchor="ctr"/>
           <a:lstStyle/>
           <a:p>
-            <a:pPr indent="0" marL="0">
-              <a:buNone/>
-            </a:pPr>
-            <a:r>
-              <a:rPr lang="en-US" sz="1150" dirty="0">
+            <a:pPr marL="0" indent="0">
+              <a:buNone/>
+            </a:pPr>
+            <a:r>
+              <a:rPr lang="fr-FR" sz="1150">
                 <a:solidFill>
                   <a:srgbClr val="A9B8C9"/>
                 </a:solidFill>
@@ -8078,7 +8516,7 @@
                 <a:ea typeface="Cascadia Mono" pitchFamily="34" charset="-122"/>
                 <a:cs typeface="Cascadia Mono" pitchFamily="34" charset="-120"/>
               </a:rPr>
-              <a:t>Démonstration : sql/commandes.txt puis backup/commandes_sauvegarde_restauration.txt</a:t>
+              <a:t>Présentation : création → droits → sauvegardes → restaurations</a:t>
             </a:r>
             <a:endParaRPr lang="en-US" sz="1150" dirty="0"/>
           </a:p>
@@ -8385,4 +8823,319 @@
     </a:ext>
   </a:extLst>
 </a:theme>
+</file>
+
+<file path=ppt/theme/theme2.xml><?xml version="1.0" encoding="utf-8"?>
+<a:theme xmlns:a="http://schemas.openxmlformats.org/drawingml/2006/main" name="Thème Office">
+  <a:themeElements>
+    <a:clrScheme name="Office">
+      <a:dk1>
+        <a:sysClr val="windowText" lastClr="000000"/>
+      </a:dk1>
+      <a:lt1>
+        <a:sysClr val="window" lastClr="FFFFFF"/>
+      </a:lt1>
+      <a:dk2>
+        <a:srgbClr val="0E2841"/>
+      </a:dk2>
+      <a:lt2>
+        <a:srgbClr val="E8E8E8"/>
+      </a:lt2>
+      <a:accent1>
+        <a:srgbClr val="156082"/>
+      </a:accent1>
+      <a:accent2>
+        <a:srgbClr val="E97132"/>
+      </a:accent2>
+      <a:accent3>
+        <a:srgbClr val="196B24"/>
+      </a:accent3>
+      <a:accent4>
+        <a:srgbClr val="0F9ED5"/>
+      </a:accent4>
+      <a:accent5>
+        <a:srgbClr val="A02B93"/>
+      </a:accent5>
+      <a:accent6>
+        <a:srgbClr val="4EA72E"/>
+      </a:accent6>
+      <a:hlink>
+        <a:srgbClr val="467886"/>
+      </a:hlink>
+      <a:folHlink>
+        <a:srgbClr val="96607D"/>
+      </a:folHlink>
+    </a:clrScheme>
+    <a:fontScheme name="Office">
+      <a:majorFont>
+        <a:latin typeface="Aptos Display" panose="02110004020202020204"/>
+        <a:ea typeface=""/>
+        <a:cs typeface=""/>
+        <a:font script="Jpan" typeface="游ゴシック Light"/>
+        <a:font script="Hang" typeface="맑은 고딕"/>
+        <a:font script="Hans" typeface="等线 Light"/>
+        <a:font script="Hant" typeface="新細明體"/>
+        <a:font script="Arab" typeface="Times New Roman"/>
+        <a:font script="Hebr" typeface="Times New Roman"/>
+        <a:font script="Thai" typeface="Angsana New"/>
+        <a:font script="Ethi" typeface="Nyala"/>
+        <a:font script="Beng" typeface="Vrinda"/>
+        <a:font script="Gujr" typeface="Shruti"/>
+        <a:font script="Khmr" typeface="MoolBoran"/>
+        <a:font script="Knda" typeface="Tunga"/>
+        <a:font script="Guru" typeface="Raavi"/>
+        <a:font script="Cans" typeface="Euphemia"/>
+        <a:font script="Cher" typeface="Plantagenet Cherokee"/>
+        <a:font script="Yiii" typeface="Microsoft Yi Baiti"/>
+        <a:font script="Tibt" typeface="Microsoft Himalaya"/>
+        <a:font script="Thaa" typeface="MV Boli"/>
+        <a:font script="Deva" typeface="Mangal"/>
+        <a:font script="Telu" typeface="Gautami"/>
+        <a:font script="Taml" typeface="Latha"/>
+        <a:font script="Syrc" typeface="Estrangelo Edessa"/>
+        <a:font script="Orya" typeface="Kalinga"/>
+        <a:font script="Mlym" typeface="Kartika"/>
+        <a:font script="Laoo" typeface="DokChampa"/>
+        <a:font script="Sinh" typeface="Iskoola Pota"/>
+        <a:font script="Mong" typeface="Mongolian Baiti"/>
+        <a:font script="Viet" typeface="Times New Roman"/>
+        <a:font script="Uigh" typeface="Microsoft Uighur"/>
+        <a:font script="Geor" typeface="Sylfaen"/>
+        <a:font script="Armn" typeface="Arial"/>
+        <a:font script="Bugi" typeface="Leelawadee UI"/>
+        <a:font script="Bopo" typeface="Microsoft JhengHei"/>
+        <a:font script="Java" typeface="Javanese Text"/>
+        <a:font script="Lisu" typeface="Segoe UI"/>
+        <a:font script="Mymr" typeface="Myanmar Text"/>
+        <a:font script="Nkoo" typeface="Ebrima"/>
+        <a:font script="Olck" typeface="Nirmala UI"/>
+        <a:font script="Osma" typeface="Ebrima"/>
+        <a:font script="Phag" typeface="Phagspa"/>
+        <a:font script="Syrn" typeface="Estrangelo Edessa"/>
+        <a:font script="Syrj" typeface="Estrangelo Edessa"/>
+        <a:font script="Syre" typeface="Estrangelo Edessa"/>
+        <a:font script="Sora" typeface="Nirmala UI"/>
+        <a:font script="Tale" typeface="Microsoft Tai Le"/>
+        <a:font script="Talu" typeface="Microsoft New Tai Lue"/>
+        <a:font script="Tfng" typeface="Ebrima"/>
+      </a:majorFont>
+      <a:minorFont>
+        <a:latin typeface="Aptos" panose="02110004020202020204"/>
+        <a:ea typeface=""/>
+        <a:cs typeface=""/>
+        <a:font script="Jpan" typeface="游ゴシック"/>
+        <a:font script="Hang" typeface="맑은 고딕"/>
+        <a:font script="Hans" typeface="等线"/>
+        <a:font script="Hant" typeface="新細明體"/>
+        <a:font script="Arab" typeface="Arial"/>
+        <a:font script="Hebr" typeface="Arial"/>
+        <a:font script="Thai" typeface="Cordia New"/>
+        <a:font script="Ethi" typeface="Nyala"/>
+        <a:font script="Beng" typeface="Vrinda"/>
+        <a:font script="Gujr" typeface="Shruti"/>
+        <a:font script="Khmr" typeface="DaunPenh"/>
+        <a:font script="Knda" typeface="Tunga"/>
+        <a:font script="Guru" typeface="Raavi"/>
+        <a:font script="Cans" typeface="Euphemia"/>
+        <a:font script="Cher" typeface="Plantagenet Cherokee"/>
+        <a:font script="Yiii" typeface="Microsoft Yi Baiti"/>
+        <a:font script="Tibt" typeface="Microsoft Himalaya"/>
+        <a:font script="Thaa" typeface="MV Boli"/>
+        <a:font script="Deva" typeface="Mangal"/>
+        <a:font script="Telu" typeface="Gautami"/>
+        <a:font script="Taml" typeface="Latha"/>
+        <a:font script="Syrc" typeface="Estrangelo Edessa"/>
+        <a:font script="Orya" typeface="Kalinga"/>
+        <a:font script="Mlym" typeface="Kartika"/>
+        <a:font script="Laoo" typeface="DokChampa"/>
+        <a:font script="Sinh" typeface="Iskoola Pota"/>
+        <a:font script="Mong" typeface="Mongolian Baiti"/>
+        <a:font script="Viet" typeface="Arial"/>
+        <a:font script="Uigh" typeface="Microsoft Uighur"/>
+        <a:font script="Geor" typeface="Sylfaen"/>
+        <a:font script="Armn" typeface="Arial"/>
+        <a:font script="Bugi" typeface="Leelawadee UI"/>
+        <a:font script="Bopo" typeface="Microsoft JhengHei"/>
+        <a:font script="Java" typeface="Javanese Text"/>
+        <a:font script="Lisu" typeface="Segoe UI"/>
+        <a:font script="Mymr" typeface="Myanmar Text"/>
+        <a:font script="Nkoo" typeface="Ebrima"/>
+        <a:font script="Olck" typeface="Nirmala UI"/>
+        <a:font script="Osma" typeface="Ebrima"/>
+        <a:font script="Phag" typeface="Phagspa"/>
+        <a:font script="Syrn" typeface="Estrangelo Edessa"/>
+        <a:font script="Syrj" typeface="Estrangelo Edessa"/>
+        <a:font script="Syre" typeface="Estrangelo Edessa"/>
+        <a:font script="Sora" typeface="Nirmala UI"/>
+        <a:font script="Tale" typeface="Microsoft Tai Le"/>
+        <a:font script="Talu" typeface="Microsoft New Tai Lue"/>
+        <a:font script="Tfng" typeface="Ebrima"/>
+      </a:minorFont>
+    </a:fontScheme>
+    <a:fmtScheme name="Office">
+      <a:fillStyleLst>
+        <a:solidFill>
+          <a:schemeClr val="phClr"/>
+        </a:solidFill>
+        <a:gradFill rotWithShape="1">
+          <a:gsLst>
+            <a:gs pos="0">
+              <a:schemeClr val="phClr">
+                <a:lumMod val="110000"/>
+                <a:satMod val="105000"/>
+                <a:tint val="67000"/>
+              </a:schemeClr>
+            </a:gs>
+            <a:gs pos="50000">
+              <a:schemeClr val="phClr">
+                <a:lumMod val="105000"/>
+                <a:satMod val="103000"/>
+                <a:tint val="73000"/>
+              </a:schemeClr>
+            </a:gs>
+            <a:gs pos="100000">
+              <a:schemeClr val="phClr">
+                <a:lumMod val="105000"/>
+                <a:satMod val="109000"/>
+                <a:tint val="81000"/>
+              </a:schemeClr>
+            </a:gs>
+          </a:gsLst>
+          <a:lin ang="5400000" scaled="0"/>
+        </a:gradFill>
+        <a:gradFill rotWithShape="1">
+          <a:gsLst>
+            <a:gs pos="0">
+              <a:schemeClr val="phClr">
+                <a:satMod val="103000"/>
+                <a:lumMod val="102000"/>
+                <a:tint val="94000"/>
+              </a:schemeClr>
+            </a:gs>
+            <a:gs pos="50000">
+              <a:schemeClr val="phClr">
+                <a:satMod val="110000"/>
+                <a:lumMod val="100000"/>
+                <a:shade val="100000"/>
+              </a:schemeClr>
+            </a:gs>
+            <a:gs pos="100000">
+              <a:schemeClr val="phClr">
+                <a:lumMod val="99000"/>
+                <a:satMod val="120000"/>
+                <a:shade val="78000"/>
+              </a:schemeClr>
+            </a:gs>
+          </a:gsLst>
+          <a:lin ang="5400000" scaled="0"/>
+        </a:gradFill>
+      </a:fillStyleLst>
+      <a:lnStyleLst>
+        <a:ln w="12700" cap="flat" cmpd="sng" algn="ctr">
+          <a:solidFill>
+            <a:schemeClr val="phClr"/>
+          </a:solidFill>
+          <a:prstDash val="solid"/>
+          <a:miter lim="800000"/>
+        </a:ln>
+        <a:ln w="19050" cap="flat" cmpd="sng" algn="ctr">
+          <a:solidFill>
+            <a:schemeClr val="phClr"/>
+          </a:solidFill>
+          <a:prstDash val="solid"/>
+          <a:miter lim="800000"/>
+        </a:ln>
+        <a:ln w="25400" cap="flat" cmpd="sng" algn="ctr">
+          <a:solidFill>
+            <a:schemeClr val="phClr"/>
+          </a:solidFill>
+          <a:prstDash val="solid"/>
+          <a:miter lim="800000"/>
+        </a:ln>
+      </a:lnStyleLst>
+      <a:effectStyleLst>
+        <a:effectStyle>
+          <a:effectLst/>
+        </a:effectStyle>
+        <a:effectStyle>
+          <a:effectLst/>
+        </a:effectStyle>
+        <a:effectStyle>
+          <a:effectLst>
+            <a:outerShdw blurRad="57150" dist="19050" dir="5400000" algn="ctr" rotWithShape="0">
+              <a:srgbClr val="000000">
+                <a:alpha val="63000"/>
+              </a:srgbClr>
+            </a:outerShdw>
+          </a:effectLst>
+        </a:effectStyle>
+      </a:effectStyleLst>
+      <a:bgFillStyleLst>
+        <a:solidFill>
+          <a:schemeClr val="phClr"/>
+        </a:solidFill>
+        <a:solidFill>
+          <a:schemeClr val="phClr">
+            <a:tint val="95000"/>
+            <a:satMod val="170000"/>
+          </a:schemeClr>
+        </a:solidFill>
+        <a:gradFill rotWithShape="1">
+          <a:gsLst>
+            <a:gs pos="0">
+              <a:schemeClr val="phClr">
+                <a:tint val="93000"/>
+                <a:satMod val="150000"/>
+                <a:shade val="98000"/>
+                <a:lumMod val="102000"/>
+              </a:schemeClr>
+            </a:gs>
+            <a:gs pos="50000">
+              <a:schemeClr val="phClr">
+                <a:tint val="98000"/>
+                <a:satMod val="130000"/>
+                <a:shade val="90000"/>
+                <a:lumMod val="103000"/>
+              </a:schemeClr>
+            </a:gs>
+            <a:gs pos="100000">
+              <a:schemeClr val="phClr">
+                <a:shade val="63000"/>
+                <a:satMod val="120000"/>
+              </a:schemeClr>
+            </a:gs>
+          </a:gsLst>
+          <a:lin ang="5400000" scaled="0"/>
+        </a:gradFill>
+      </a:bgFillStyleLst>
+    </a:fmtScheme>
+  </a:themeElements>
+  <a:objectDefaults>
+    <a:lnDef>
+      <a:spPr/>
+      <a:bodyPr/>
+      <a:lstStyle/>
+      <a:style>
+        <a:lnRef idx="2">
+          <a:schemeClr val="accent1"/>
+        </a:lnRef>
+        <a:fillRef idx="0">
+          <a:schemeClr val="accent1"/>
+        </a:fillRef>
+        <a:effectRef idx="1">
+          <a:schemeClr val="accent1"/>
+        </a:effectRef>
+        <a:fontRef idx="minor">
+          <a:schemeClr val="tx1"/>
+        </a:fontRef>
+      </a:style>
+    </a:lnDef>
+  </a:objectDefaults>
+  <a:extraClrSchemeLst/>
+  <a:extLst>
+    <a:ext uri="{05A4C25C-085E-4340-85A3-A5531E510DB2}">
+      <thm15:themeFamily xmlns:thm15="http://schemas.microsoft.com/office/thememl/2012/main" name="Office Theme" id="{2E142A2C-CD16-42D6-873A-C26D2A0506FA}" vid="{1BDDFF52-6CD6-40A5-AB3C-68EB2F1E4D0A}"/>
+    </a:ext>
+  </a:extLst>
+</a:theme>
 </file>